--- a/05-AI应用基础48课时版/V2授课PPT/W13-第9次课-MLP神经网络（上）：基.pptx
+++ b/05-AI应用基础48课时版/V2授课PPT/W13-第9次课-MLP神经网络（上）：基.pptx
@@ -6465,7 +6465,7 @@
                 </a:solidFill>
                 <a:latin typeface="微软雅黑"/>
               </a:rPr>
-              <a:t>第18周 · 第9次课（2课时 · 80分钟）</a:t>
+              <a:t>第13周 · 第9次课（2课时 · 80分钟）</a:t>
             </a:r>
           </a:p>
           <a:p>
@@ -60212,7 +60212,7 @@
                 </a:solidFill>
                 <a:latin typeface="微软雅黑"/>
               </a:rPr>
-              <a:t>下次课预告（第14周）</a:t>
+              <a:t>下次课预告（第13周）</a:t>
             </a:r>
           </a:p>
         </p:txBody>

--- a/05-AI应用基础48课时版/V2授课PPT/W13-第9次课-MLP神经网络（上）：基.pptx
+++ b/05-AI应用基础48课时版/V2授课PPT/W13-第9次课-MLP神经网络（上）：基.pptx
@@ -44,6 +44,9 @@
     <p:sldId id="316" r:id="rId68"/>
     <p:sldId id="364" r:id="rId63"/>
     <p:sldId id="365" r:id="rId72"/>
+    <p:sldId id="366" r:id="rId61"/>
+    <p:sldId id="367" r:id="rId74"/>
+    <p:sldId id="368" r:id="rId59"/>
     <p:sldId id="363" r:id="rId70"/>
     <p:sldId id="317" r:id="rId69"/>
     <p:sldId id="319" r:id="rId71"/>
@@ -8196,7 +8199,7 @@
                 </a:solidFill>
                 <a:latin typeface="微软雅黑"/>
               </a:rPr>
-              <a:t>10 / 65</a:t>
+              <a:t>10 / 68</a:t>
             </a:r>
           </a:p>
         </p:txBody>
@@ -9051,7 +9054,7 @@
                 </a:solidFill>
                 <a:latin typeface="微软雅黑"/>
               </a:rPr>
-              <a:t>11 / 65</a:t>
+              <a:t>11 / 68</a:t>
             </a:r>
           </a:p>
         </p:txBody>
@@ -9843,7 +9846,7 @@
                 </a:solidFill>
                 <a:latin typeface="微软雅黑"/>
               </a:rPr>
-              <a:t>12 / 65</a:t>
+              <a:t>12 / 68</a:t>
             </a:r>
           </a:p>
         </p:txBody>
@@ -10329,7 +10332,7 @@
                 </a:solidFill>
                 <a:latin typeface="微软雅黑"/>
               </a:rPr>
-              <a:t>13 / 65</a:t>
+              <a:t>13 / 68</a:t>
             </a:r>
           </a:p>
         </p:txBody>
@@ -11272,7 +11275,7 @@
                 </a:solidFill>
                 <a:latin typeface="微软雅黑"/>
               </a:rPr>
-              <a:t>14 / 65</a:t>
+              <a:t>14 / 68</a:t>
             </a:r>
           </a:p>
         </p:txBody>
@@ -11978,7 +11981,7 @@
                 </a:solidFill>
                 <a:latin typeface="微软雅黑"/>
               </a:rPr>
-              <a:t>15 / 65</a:t>
+              <a:t>15 / 68</a:t>
             </a:r>
           </a:p>
         </p:txBody>
@@ -12684,7 +12687,7 @@
                 </a:solidFill>
                 <a:latin typeface="微软雅黑"/>
               </a:rPr>
-              <a:t>16 / 65</a:t>
+              <a:t>16 / 68</a:t>
             </a:r>
           </a:p>
         </p:txBody>
@@ -13390,7 +13393,7 @@
                 </a:solidFill>
                 <a:latin typeface="微软雅黑"/>
               </a:rPr>
-              <a:t>17 / 65</a:t>
+              <a:t>17 / 68</a:t>
             </a:r>
           </a:p>
         </p:txBody>
@@ -14096,7 +14099,7 @@
                 </a:solidFill>
                 <a:latin typeface="微软雅黑"/>
               </a:rPr>
-              <a:t>18 / 65</a:t>
+              <a:t>18 / 68</a:t>
             </a:r>
           </a:p>
         </p:txBody>
@@ -14570,7 +14573,7 @@
                 </a:solidFill>
                 <a:latin typeface="微软雅黑"/>
               </a:rPr>
-              <a:t>19 / 65</a:t>
+              <a:t>19 / 68</a:t>
             </a:r>
           </a:p>
         </p:txBody>
@@ -16298,7 +16301,7 @@
                 </a:solidFill>
                 <a:latin typeface="微软雅黑"/>
               </a:rPr>
-              <a:t>2 / 65</a:t>
+              <a:t>2 / 68</a:t>
             </a:r>
           </a:p>
         </p:txBody>
@@ -17004,7 +17007,7 @@
                 </a:solidFill>
                 <a:latin typeface="微软雅黑"/>
               </a:rPr>
-              <a:t>20 / 65</a:t>
+              <a:t>20 / 68</a:t>
             </a:r>
           </a:p>
         </p:txBody>
@@ -17859,7 +17862,7 @@
                 </a:solidFill>
                 <a:latin typeface="微软雅黑"/>
               </a:rPr>
-              <a:t>21 / 65</a:t>
+              <a:t>21 / 68</a:t>
             </a:r>
           </a:p>
         </p:txBody>
@@ -18829,7 +18832,7 @@
                 </a:solidFill>
                 <a:latin typeface="微软雅黑"/>
               </a:rPr>
-              <a:t>22 / 65</a:t>
+              <a:t>22 / 68</a:t>
             </a:r>
           </a:p>
         </p:txBody>
@@ -19799,7 +19802,7 @@
                 </a:solidFill>
                 <a:latin typeface="微软雅黑"/>
               </a:rPr>
-              <a:t>23 / 65</a:t>
+              <a:t>23 / 68</a:t>
             </a:r>
           </a:p>
         </p:txBody>
@@ -20335,7 +20338,7 @@
                 </a:solidFill>
                 <a:latin typeface="微软雅黑"/>
               </a:rPr>
-              <a:t>24 / 65</a:t>
+              <a:t>24 / 68</a:t>
             </a:r>
           </a:p>
         </p:txBody>
@@ -21305,7 +21308,7 @@
                 </a:solidFill>
                 <a:latin typeface="微软雅黑"/>
               </a:rPr>
-              <a:t>25 / 65</a:t>
+              <a:t>25 / 68</a:t>
             </a:r>
           </a:p>
         </p:txBody>
@@ -22275,7 +22278,7 @@
                 </a:solidFill>
                 <a:latin typeface="微软雅黑"/>
               </a:rPr>
-              <a:t>26 / 65</a:t>
+              <a:t>26 / 68</a:t>
             </a:r>
           </a:p>
         </p:txBody>
@@ -23245,7 +23248,7 @@
                 </a:solidFill>
                 <a:latin typeface="微软雅黑"/>
               </a:rPr>
-              <a:t>27 / 65</a:t>
+              <a:t>27 / 68</a:t>
             </a:r>
           </a:p>
         </p:txBody>
@@ -24215,7 +24218,7 @@
                 </a:solidFill>
                 <a:latin typeface="微软雅黑"/>
               </a:rPr>
-              <a:t>28 / 65</a:t>
+              <a:t>28 / 68</a:t>
             </a:r>
           </a:p>
         </p:txBody>
@@ -25187,7 +25190,7 @@
                 </a:solidFill>
                 <a:latin typeface="微软雅黑"/>
               </a:rPr>
-              <a:t>29 / 65</a:t>
+              <a:t>29 / 68</a:t>
             </a:r>
           </a:p>
         </p:txBody>
@@ -25979,7 +25982,7 @@
                 </a:solidFill>
                 <a:latin typeface="微软雅黑"/>
               </a:rPr>
-              <a:t>3 / 65</a:t>
+              <a:t>3 / 68</a:t>
             </a:r>
           </a:p>
         </p:txBody>
@@ -26423,7 +26426,7 @@
                 </a:solidFill>
                 <a:latin typeface="微软雅黑"/>
               </a:rPr>
-              <a:t>30 / 65</a:t>
+              <a:t>30 / 68</a:t>
             </a:r>
           </a:p>
         </p:txBody>
@@ -26867,7 +26870,7 @@
                 </a:solidFill>
                 <a:latin typeface="微软雅黑"/>
               </a:rPr>
-              <a:t>31 / 65</a:t>
+              <a:t>31 / 68</a:t>
             </a:r>
           </a:p>
         </p:txBody>
@@ -27911,7 +27914,7 @@
                 </a:solidFill>
                 <a:latin typeface="微软雅黑"/>
               </a:rPr>
-              <a:t>32 / 65</a:t>
+              <a:t>32 / 68</a:t>
             </a:r>
           </a:p>
         </p:txBody>
@@ -28617,7 +28620,7 @@
                 </a:solidFill>
                 <a:latin typeface="微软雅黑"/>
               </a:rPr>
-              <a:t>33 / 65</a:t>
+              <a:t>33 / 68</a:t>
             </a:r>
           </a:p>
         </p:txBody>
@@ -29472,7 +29475,7 @@
                 </a:solidFill>
                 <a:latin typeface="微软雅黑"/>
               </a:rPr>
-              <a:t>34 / 65</a:t>
+              <a:t>34 / 68</a:t>
             </a:r>
           </a:p>
         </p:txBody>
@@ -31540,7 +31543,7 @@
                 </a:solidFill>
                 <a:latin typeface="微软雅黑"/>
               </a:rPr>
-              <a:t>35 / 65</a:t>
+              <a:t>35 / 68</a:t>
             </a:r>
           </a:p>
         </p:txBody>
@@ -32332,7 +32335,7 @@
                 </a:solidFill>
                 <a:latin typeface="微软雅黑"/>
               </a:rPr>
-              <a:t>36 / 65</a:t>
+              <a:t>36 / 68</a:t>
             </a:r>
           </a:p>
         </p:txBody>
@@ -33003,7 +33006,7 @@
                 </a:solidFill>
                 <a:latin typeface="微软雅黑"/>
               </a:rPr>
-              <a:t>37 / 65</a:t>
+              <a:t>37 / 68</a:t>
             </a:r>
           </a:p>
         </p:txBody>
@@ -33279,7 +33282,7 @@
                 </a:solidFill>
                 <a:latin typeface="微软雅黑"/>
               </a:rPr>
-              <a:t>38 / 65</a:t>
+              <a:t>38 / 68</a:t>
             </a:r>
           </a:p>
         </p:txBody>
@@ -33451,142 +33454,87 @@
                   <a:srgbClr val="0545E8"/>
                 </a:solidFill>
               </a:rPr>
-              <a:t>① 参考实现真实运行输出（本工单完成态）</a:t>
-            </a:r>
-          </a:p>
-          <a:p>
-            <a:pPr algn="l">
-              <a:spcBef>
-                <a:spcPts val="100"/>
-              </a:spcBef>
-            </a:pPr>
-            <a:r>
-              <a:rPr sz="1000" b="0">
-                <a:solidFill>
-                  <a:srgbClr val="010328"/>
-                </a:solidFill>
-              </a:rPr>
-              <a:t>=== 工单 M2-3a MLP 神经网络 · 完成态 ===</a:t>
-            </a:r>
-          </a:p>
-          <a:p>
-            <a:pPr algn="l">
-              <a:spcBef>
-                <a:spcPts val="100"/>
-              </a:spcBef>
-            </a:pPr>
-            <a:r>
-              <a:rPr sz="1000" b="0">
-                <a:solidFill>
-                  <a:srgbClr val="010328"/>
-                </a:solidFill>
-              </a:rPr>
-              <a:t>数据: 600 样本 × 30 维频谱 · 隐藏层 (64, 32) · 标准化已启用</a:t>
-            </a:r>
-          </a:p>
-          <a:p>
-            <a:pPr algn="l">
-              <a:spcBef>
-                <a:spcPts val="100"/>
-              </a:spcBef>
-            </a:pPr>
-            <a:r>
-              <a:rPr sz="1000" b="0">
-                <a:solidFill>
-                  <a:srgbClr val="010328"/>
-                </a:solidFill>
-              </a:rPr>
-              <a:t>训练轮数 37（early_stopping 提前停止）  测试准确率 = 0.933（目标≥0.75）</a:t>
-            </a:r>
-          </a:p>
-          <a:p>
-            <a:pPr algn="l">
-              <a:spcBef>
-                <a:spcPts val="100"/>
-              </a:spcBef>
-            </a:pPr>
-            <a:r>
-              <a:rPr sz="1000" b="0">
-                <a:solidFill>
-                  <a:srgbClr val="010328"/>
-                </a:solidFill>
-              </a:rPr>
-              <a:t>损失曲线诊断:</a:t>
-            </a:r>
-          </a:p>
-          <a:p>
-            <a:pPr algn="l">
-              <a:spcBef>
-                <a:spcPts val="100"/>
-              </a:spcBef>
-            </a:pPr>
-            <a:r>
-              <a:rPr sz="1000" b="0">
-                <a:solidFill>
-                  <a:srgbClr val="010328"/>
-                </a:solidFill>
-              </a:rPr>
-              <a:t>  首轮   epoch  1  loss=0.6484</a:t>
-            </a:r>
-          </a:p>
-          <a:p>
-            <a:pPr algn="l">
-              <a:spcBef>
-                <a:spcPts val="100"/>
-              </a:spcBef>
-            </a:pPr>
-            <a:r>
-              <a:rPr sz="1000" b="0">
-                <a:solidFill>
-                  <a:srgbClr val="010328"/>
-                </a:solidFill>
-              </a:rPr>
-              <a:t>  1/4  epoch 10  loss=0.4235  ×2</a:t>
-            </a:r>
-          </a:p>
-          <a:p>
-            <a:pPr algn="l">
-              <a:spcBef>
-                <a:spcPts val="100"/>
-              </a:spcBef>
-            </a:pPr>
-            <a:r>
-              <a:rPr sz="1000" b="0">
-                <a:solidFill>
-                  <a:srgbClr val="010328"/>
-                </a:solidFill>
-              </a:rPr>
-              <a:t>  末轮   epoch 37  loss=0.1044</a:t>
-            </a:r>
-          </a:p>
-          <a:p>
-            <a:pPr algn="l">
-              <a:spcBef>
-                <a:spcPts val="100"/>
-              </a:spcBef>
-            </a:pPr>
-            <a:r>
-              <a:rPr sz="1000" b="0">
-                <a:solidFill>
-                  <a:srgbClr val="010328"/>
-                </a:solidFill>
-              </a:rPr>
-              <a:t>  收敛判断: 末轮loss 0.1044 持续下降→收敛良好</a:t>
-            </a:r>
-          </a:p>
-          <a:p>
-            <a:pPr algn="l">
-              <a:spcBef>
-                <a:spcPts val="100"/>
-              </a:spcBef>
-            </a:pPr>
-            <a:r>
-              <a:rPr sz="1000" b="0">
-                <a:solidFill>
-                  <a:srgbClr val="010328"/>
-                </a:solidFill>
-              </a:rPr>
-              <a:t>结论: 中频段抬升（2-7维）是可学信号；网络结构+早停+正则三件套，准确率与泛化同时守住。</a:t>
+              <a:t>① 本次真跑实测输出（逐字取自 output/report.txt）</a:t>
+            </a:r>
+          </a:p>
+          <a:p>
+            <a:r>
+              <a:rPr sz="1400" b="1">
+                <a:solidFill>
+                  <a:srgbClr val="0545E8"/>
+                </a:solidFill>
+              </a:rPr>
+              <a:t>实测达成档位: 优(A) ｜ 基线实测 acc 0.9400｜最高 acc 0.9467｜PNG 实测 48810B（下限 1000）｜无 Dropout gap 0.6744 → 合规臂 Dropout 0.1：gap 0.6744→0.6296 且 acc 0.9267≥基线 0.9267｜性价比最优结构 [64, 32]（params=4130）｜决策记录完整（result.json 回读校验）｜实测规范率 94.74%</a:t>
+            </a:r>
+          </a:p>
+          <a:p>
+            <a:r>
+              <a:rPr sz="1400" b="1">
+                <a:solidFill>
+                  <a:srgbClr val="0545E8"/>
+                </a:solidFill>
+              </a:rPr>
+              <a:t>及格(D)    规范率门槛≥70% [达标] ｜ 功能OK ｜ 模板可运行出指标；代码规范率≥70%</a:t>
+            </a:r>
+          </a:p>
+          <a:p>
+            <a:r>
+              <a:rPr sz="1400" b="1">
+                <a:solidFill>
+                  <a:srgbClr val="0545E8"/>
+                </a:solidFill>
+              </a:rPr>
+              <a:t>良好(C)    规范率门槛≥70% [达标] ｜ 功能OK ｜ 准确率≥75%图完整</a:t>
+            </a:r>
+          </a:p>
+          <a:p>
+            <a:r>
+              <a:rPr sz="1400" b="1">
+                <a:solidFill>
+                  <a:srgbClr val="0545E8"/>
+                </a:solidFill>
+              </a:rPr>
+              <a:t>优秀(B)    规范率门槛≥70% [达标] ｜ 功能OK ｜ gap收窄且指标不降；决策记录完整</a:t>
+            </a:r>
+          </a:p>
+          <a:p>
+            <a:r>
+              <a:rPr sz="1400" b="1">
+                <a:solidFill>
+                  <a:srgbClr val="0545E8"/>
+                </a:solidFill>
+              </a:rPr>
+              <a:t>优(A)     规范率门槛≥70% [达标] ｜ 功能OK ｜ 找到性价比最优结构</a:t>
+            </a:r>
+          </a:p>
+          <a:p>
+            <a:r>
+              <a:rPr sz="1400" b="1">
+                <a:solidFill>
+                  <a:srgbClr val="0545E8"/>
+                </a:solidFill>
+              </a:rPr>
+              <a:t>损失曲线判读口述：什么形状算过拟合、早停为何定在那一轮——答辩必答</a:t>
+            </a:r>
+          </a:p>
+          <a:p>
+            <a:r>
+              <a:rPr sz="1400" b="1">
+                <a:solidFill>
+                  <a:srgbClr val="0545E8"/>
+                </a:solidFill>
+              </a:rPr>
+              <a:t>决策矩阵小组打分（可行性/达标概率/工时）：课堂 3 分钟人工环节</a:t>
+            </a:r>
+          </a:p>
+          <a:p>
+            <a:r>
+              <a:rPr sz="1400" b="1">
+                <a:solidFill>
+                  <a:srgbClr val="0545E8"/>
+                </a:solidFill>
+              </a:rPr>
+              <a:t>企业元验收栏：值班师傅签认（功能可用/参数留痕/数据可信）</a:t>
             </a:r>
           </a:p>
         </p:txBody>
@@ -33960,7 +33908,7 @@
                 </a:solidFill>
                 <a:latin typeface="微软雅黑"/>
               </a:rPr>
-              <a:t>39 / 65</a:t>
+              <a:t>39 / 68</a:t>
             </a:r>
           </a:p>
         </p:txBody>
@@ -35154,7 +35102,7 @@
                 </a:solidFill>
                 <a:latin typeface="微软雅黑"/>
               </a:rPr>
-              <a:t>4 / 65</a:t>
+              <a:t>4 / 68</a:t>
             </a:r>
           </a:p>
         </p:txBody>
@@ -35430,7 +35378,7 @@
                 </a:solidFill>
                 <a:latin typeface="微软雅黑"/>
               </a:rPr>
-              <a:t>40 / 65</a:t>
+              <a:t>43 / 68</a:t>
             </a:r>
           </a:p>
         </p:txBody>
@@ -36599,7 +36547,7 @@
         <p:spPr>
           <a:xfrm>
             <a:off x="940000" y="5720000"/>
-            <a:ext cx="10500000" cy="520000"/>
+            <a:ext cx="10500000" cy="731520"/>
           </a:xfrm>
           <a:prstGeom prst="rect">
             <a:avLst/>
@@ -36621,13 +36569,24 @@
               </a:spcAft>
             </a:pPr>
             <a:r>
-              <a:rPr sz="1350" b="1">
+              <a:rPr sz="1050" b="1">
                 <a:solidFill>
                   <a:srgbClr val="010328"/>
                 </a:solidFill>
                 <a:latin typeface="微软雅黑"/>
               </a:rPr>
               <a:t>✔ 达标标准: 模板可运行出指标</a:t>
+            </a:r>
+          </a:p>
+          <a:p>
+            <a:r>
+              <a:rPr sz="1050" b="1">
+                <a:solidFill>
+                  <a:srgbClr val="010328"/>
+                </a:solidFill>
+                <a:latin typeface="微软雅黑"/>
+              </a:rPr>
+              <a:t>✓ 本次实测达标 ｜ 规范率门槛≥70% [达标] ｜ 功能OK</a:t>
             </a:r>
           </a:p>
         </p:txBody>
@@ -36755,7 +36714,7 @@
                 </a:solidFill>
                 <a:latin typeface="微软雅黑"/>
               </a:rPr>
-              <a:t>41 / 65</a:t>
+              <a:t>44 / 68</a:t>
             </a:r>
           </a:p>
         </p:txBody>
@@ -37519,7 +37478,7 @@
         <p:spPr>
           <a:xfrm>
             <a:off x="940000" y="5720000"/>
-            <a:ext cx="10500000" cy="520000"/>
+            <a:ext cx="10500000" cy="731520"/>
           </a:xfrm>
           <a:prstGeom prst="rect">
             <a:avLst/>
@@ -37541,13 +37500,24 @@
               </a:spcAft>
             </a:pPr>
             <a:r>
-              <a:rPr sz="1350" b="1">
+              <a:rPr sz="1050" b="1">
                 <a:solidFill>
                   <a:srgbClr val="010328"/>
                 </a:solidFill>
                 <a:latin typeface="微软雅黑"/>
               </a:rPr>
               <a:t>✔ 达标标准: 准确率≥75%图完整</a:t>
+            </a:r>
+          </a:p>
+          <a:p>
+            <a:r>
+              <a:rPr sz="1050" b="1">
+                <a:solidFill>
+                  <a:srgbClr val="010328"/>
+                </a:solidFill>
+                <a:latin typeface="微软雅黑"/>
+              </a:rPr>
+              <a:t>✓ 本次实测达标 ｜ 规范率门槛≥70% [达标] ｜ 功能OK</a:t>
             </a:r>
           </a:p>
         </p:txBody>
@@ -37675,7 +37645,7 @@
                 </a:solidFill>
                 <a:latin typeface="微软雅黑"/>
               </a:rPr>
-              <a:t>42 / 65</a:t>
+              <a:t>45 / 68</a:t>
             </a:r>
           </a:p>
         </p:txBody>
@@ -38439,7 +38409,7 @@
         <p:spPr>
           <a:xfrm>
             <a:off x="940000" y="5720000"/>
-            <a:ext cx="10500000" cy="520000"/>
+            <a:ext cx="10500000" cy="731520"/>
           </a:xfrm>
           <a:prstGeom prst="rect">
             <a:avLst/>
@@ -38461,13 +38431,24 @@
               </a:spcAft>
             </a:pPr>
             <a:r>
-              <a:rPr sz="1350" b="1">
+              <a:rPr sz="1050" b="1">
                 <a:solidFill>
                   <a:srgbClr val="010328"/>
                 </a:solidFill>
                 <a:latin typeface="微软雅黑"/>
               </a:rPr>
               <a:t>✔ 达标标准: gap收窄且指标不降</a:t>
+            </a:r>
+          </a:p>
+          <a:p>
+            <a:r>
+              <a:rPr sz="1050" b="1">
+                <a:solidFill>
+                  <a:srgbClr val="010328"/>
+                </a:solidFill>
+                <a:latin typeface="微软雅黑"/>
+              </a:rPr>
+              <a:t>✓ 本次实测达标 ｜ 规范率门槛≥70% [达标] ｜ 功能OK</a:t>
             </a:r>
           </a:p>
         </p:txBody>
@@ -38595,7 +38576,7 @@
                 </a:solidFill>
                 <a:latin typeface="微软雅黑"/>
               </a:rPr>
-              <a:t>43 / 65</a:t>
+              <a:t>46 / 68</a:t>
             </a:r>
           </a:p>
         </p:txBody>
@@ -39359,7 +39340,7 @@
         <p:spPr>
           <a:xfrm>
             <a:off x="940000" y="5720000"/>
-            <a:ext cx="10500000" cy="520000"/>
+            <a:ext cx="10500000" cy="731520"/>
           </a:xfrm>
           <a:prstGeom prst="rect">
             <a:avLst/>
@@ -39381,13 +39362,24 @@
               </a:spcAft>
             </a:pPr>
             <a:r>
-              <a:rPr sz="1350" b="1">
+              <a:rPr sz="1050" b="1">
                 <a:solidFill>
                   <a:srgbClr val="010328"/>
                 </a:solidFill>
                 <a:latin typeface="微软雅黑"/>
               </a:rPr>
               <a:t>✔ 达标标准: 找到性价比最优结构</a:t>
+            </a:r>
+          </a:p>
+          <a:p>
+            <a:r>
+              <a:rPr sz="1050" b="1">
+                <a:solidFill>
+                  <a:srgbClr val="010328"/>
+                </a:solidFill>
+                <a:latin typeface="微软雅黑"/>
+              </a:rPr>
+              <a:t>✓ 本次实测达标 ｜ 规范率门槛≥70% [达标] ｜ 功能OK</a:t>
             </a:r>
           </a:p>
         </p:txBody>
@@ -39515,7 +39507,7 @@
                 </a:solidFill>
                 <a:latin typeface="微软雅黑"/>
               </a:rPr>
-              <a:t>44 / 65</a:t>
+              <a:t>47 / 68</a:t>
             </a:r>
           </a:p>
         </p:txBody>
@@ -40439,7 +40431,7 @@
                 </a:solidFill>
                 <a:latin typeface="微软雅黑"/>
               </a:rPr>
-              <a:t>45 / 65</a:t>
+              <a:t>48 / 68</a:t>
             </a:r>
           </a:p>
         </p:txBody>
@@ -41611,7 +41603,7 @@
                 </a:solidFill>
                 <a:latin typeface="微软雅黑"/>
               </a:rPr>
-              <a:t>46 / 65</a:t>
+              <a:t>49 / 68</a:t>
             </a:r>
           </a:p>
         </p:txBody>
@@ -42403,7 +42395,7 @@
                 </a:solidFill>
                 <a:latin typeface="微软雅黑"/>
               </a:rPr>
-              <a:t>47 / 65</a:t>
+              <a:t>50 / 68</a:t>
             </a:r>
           </a:p>
         </p:txBody>
@@ -43195,7 +43187,7 @@
                 </a:solidFill>
                 <a:latin typeface="微软雅黑"/>
               </a:rPr>
-              <a:t>48 / 65</a:t>
+              <a:t>51 / 68</a:t>
             </a:r>
           </a:p>
         </p:txBody>
@@ -44050,7 +44042,7 @@
                 </a:solidFill>
                 <a:latin typeface="微软雅黑"/>
               </a:rPr>
-              <a:t>49 / 65</a:t>
+              <a:t>52 / 68</a:t>
             </a:r>
           </a:p>
         </p:txBody>
@@ -45022,7 +45014,7 @@
                 </a:solidFill>
                 <a:latin typeface="微软雅黑"/>
               </a:rPr>
-              <a:t>5 / 65</a:t>
+              <a:t>5 / 68</a:t>
             </a:r>
           </a:p>
         </p:txBody>
@@ -45730,7 +45722,7 @@
                 </a:solidFill>
                 <a:latin typeface="微软雅黑"/>
               </a:rPr>
-              <a:t>50 / 65</a:t>
+              <a:t>53 / 68</a:t>
             </a:r>
           </a:p>
         </p:txBody>
@@ -46370,7 +46362,7 @@
                 </a:solidFill>
                 <a:latin typeface="微软雅黑"/>
               </a:rPr>
-              <a:t>51 / 65</a:t>
+              <a:t>54 / 68</a:t>
             </a:r>
           </a:p>
         </p:txBody>
@@ -47342,7 +47334,7 @@
                 </a:solidFill>
                 <a:latin typeface="微软雅黑"/>
               </a:rPr>
-              <a:t>52 / 65</a:t>
+              <a:t>55 / 68</a:t>
             </a:r>
           </a:p>
         </p:txBody>
@@ -48134,7 +48126,7 @@
                 </a:solidFill>
                 <a:latin typeface="微软雅黑"/>
               </a:rPr>
-              <a:t>53 / 65</a:t>
+              <a:t>56 / 68</a:t>
             </a:r>
           </a:p>
         </p:txBody>
@@ -49766,7 +49758,7 @@
                 </a:solidFill>
                 <a:latin typeface="微软雅黑"/>
               </a:rPr>
-              <a:t>54 / 65</a:t>
+              <a:t>57 / 68</a:t>
             </a:r>
           </a:p>
         </p:txBody>
@@ -50564,7 +50556,7 @@
                 </a:solidFill>
                 <a:latin typeface="微软雅黑"/>
               </a:rPr>
-              <a:t>55 / 65</a:t>
+              <a:t>58 / 68</a:t>
             </a:r>
           </a:p>
         </p:txBody>
@@ -51710,7 +51702,7 @@
                 </a:solidFill>
                 <a:latin typeface="微软雅黑"/>
               </a:rPr>
-              <a:t>56 / 65</a:t>
+              <a:t>59 / 68</a:t>
             </a:r>
           </a:p>
         </p:txBody>
@@ -52563,7 +52555,7 @@
                 </a:solidFill>
                 <a:latin typeface="微软雅黑"/>
               </a:rPr>
-              <a:t>57 / 65</a:t>
+              <a:t>60 / 68</a:t>
             </a:r>
           </a:p>
         </p:txBody>
@@ -53535,7 +53527,7 @@
                 </a:solidFill>
                 <a:latin typeface="微软雅黑"/>
               </a:rPr>
-              <a:t>58 / 65</a:t>
+              <a:t>61 / 68</a:t>
             </a:r>
           </a:p>
         </p:txBody>
@@ -54507,7 +54499,7 @@
                 </a:solidFill>
                 <a:latin typeface="微软雅黑"/>
               </a:rPr>
-              <a:t>59 / 65</a:t>
+              <a:t>62 / 68</a:t>
             </a:r>
           </a:p>
         </p:txBody>
@@ -55975,7 +55967,7 @@
                 </a:solidFill>
                 <a:latin typeface="微软雅黑"/>
               </a:rPr>
-              <a:t>6 / 65</a:t>
+              <a:t>6 / 68</a:t>
             </a:r>
           </a:p>
         </p:txBody>
@@ -56947,7 +56939,7 @@
                 </a:solidFill>
                 <a:latin typeface="微软雅黑"/>
               </a:rPr>
-              <a:t>60 / 65</a:t>
+              <a:t>63 / 68</a:t>
             </a:r>
           </a:p>
         </p:txBody>
@@ -58206,7 +58198,7 @@
                 </a:solidFill>
                 <a:latin typeface="微软雅黑"/>
               </a:rPr>
-              <a:t>61 / 65</a:t>
+              <a:t>64 / 68</a:t>
             </a:r>
           </a:p>
         </p:txBody>
@@ -58998,7 +58990,7 @@
                 </a:solidFill>
                 <a:latin typeface="微软雅黑"/>
               </a:rPr>
-              <a:t>62 / 65</a:t>
+              <a:t>65 / 68</a:t>
             </a:r>
           </a:p>
         </p:txBody>
@@ -59704,7 +59696,7 @@
                 </a:solidFill>
                 <a:latin typeface="微软雅黑"/>
               </a:rPr>
-              <a:t>63 / 65</a:t>
+              <a:t>66 / 68</a:t>
             </a:r>
           </a:p>
         </p:txBody>
@@ -60064,7 +60056,7 @@
                 </a:solidFill>
                 <a:latin typeface="微软雅黑"/>
               </a:rPr>
-              <a:t>64 / 65</a:t>
+              <a:t>67 / 68</a:t>
             </a:r>
           </a:p>
         </p:txBody>
@@ -60435,6 +60427,2590 @@
 </p:sld>
 </file>
 
+<file path=ppt/slides/slide66.xml><?xml version="1.0" encoding="utf-8"?>
+<p:sld xmlns:a="http://schemas.openxmlformats.org/drawingml/2006/main" xmlns:p="http://schemas.openxmlformats.org/presentationml/2006/main" xmlns:r="http://schemas.openxmlformats.org/officeDocument/2006/relationships">
+  <p:cSld>
+    <p:spTree>
+      <p:nvGrpSpPr>
+        <p:cNvPr id="1" name=""/>
+        <p:cNvGrpSpPr/>
+        <p:nvPr/>
+      </p:nvGrpSpPr>
+      <p:grpSpPr/>
+      <p:sp>
+        <p:nvSpPr>
+          <p:cNvPr id="2" name="Rectangle 1"/>
+          <p:cNvSpPr/>
+          <p:nvPr/>
+        </p:nvSpPr>
+        <p:spPr>
+          <a:xfrm>
+            <a:off x="0" y="0"/>
+            <a:ext cx="12192000" cy="1150000"/>
+          </a:xfrm>
+          <a:prstGeom prst="rect">
+            <a:avLst/>
+          </a:prstGeom>
+          <a:solidFill>
+            <a:srgbClr val="010328"/>
+          </a:solidFill>
+          <a:ln>
+            <a:noFill/>
+          </a:ln>
+          <a:effectLst/>
+        </p:spPr>
+        <p:style>
+          <a:lnRef idx="1">
+            <a:schemeClr val="accent1"/>
+          </a:lnRef>
+          <a:fillRef idx="3">
+            <a:schemeClr val="accent1"/>
+          </a:fillRef>
+          <a:effectRef idx="2">
+            <a:schemeClr val="accent1"/>
+          </a:effectRef>
+          <a:fontRef idx="minor">
+            <a:schemeClr val="lt1"/>
+          </a:fontRef>
+        </p:style>
+        <p:txBody>
+          <a:bodyPr rtlCol="0" anchor="ctr"/>
+          <a:lstStyle/>
+          <a:p>
+            <a:pPr algn="ctr"/>
+          </a:p>
+        </p:txBody>
+      </p:sp>
+      <p:sp>
+        <p:nvSpPr>
+          <p:cNvPr id="3" name="Rectangle 2"/>
+          <p:cNvSpPr/>
+          <p:nvPr/>
+        </p:nvSpPr>
+        <p:spPr>
+          <a:xfrm>
+            <a:off x="0" y="1150000"/>
+            <a:ext cx="2600000" cy="70000"/>
+          </a:xfrm>
+          <a:prstGeom prst="rect">
+            <a:avLst/>
+          </a:prstGeom>
+          <a:solidFill>
+            <a:srgbClr val="F5670F"/>
+          </a:solidFill>
+          <a:ln>
+            <a:noFill/>
+          </a:ln>
+          <a:effectLst/>
+        </p:spPr>
+        <p:style>
+          <a:lnRef idx="1">
+            <a:schemeClr val="accent1"/>
+          </a:lnRef>
+          <a:fillRef idx="3">
+            <a:schemeClr val="accent1"/>
+          </a:fillRef>
+          <a:effectRef idx="2">
+            <a:schemeClr val="accent1"/>
+          </a:effectRef>
+          <a:fontRef idx="minor">
+            <a:schemeClr val="lt1"/>
+          </a:fontRef>
+        </p:style>
+        <p:txBody>
+          <a:bodyPr rtlCol="0" anchor="ctr"/>
+          <a:lstStyle/>
+          <a:p>
+            <a:pPr algn="ctr"/>
+          </a:p>
+        </p:txBody>
+      </p:sp>
+      <p:sp>
+        <p:nvSpPr>
+          <p:cNvPr id="4" name="TextBox 3"/>
+          <p:cNvSpPr txBox="1"/>
+          <p:nvPr/>
+        </p:nvSpPr>
+        <p:spPr>
+          <a:xfrm>
+            <a:off x="700000" y="300000"/>
+            <a:ext cx="10792000" cy="700000"/>
+          </a:xfrm>
+          <a:prstGeom prst="rect">
+            <a:avLst/>
+          </a:prstGeom>
+          <a:noFill/>
+        </p:spPr>
+        <p:txBody>
+          <a:bodyPr wrap="square" anchor="t">
+            <a:spAutoFit/>
+          </a:bodyPr>
+          <a:lstStyle/>
+          <a:p>
+            <a:pPr algn="l">
+              <a:lnSpc>
+                <a:spcPct val="110000"/>
+              </a:lnSpc>
+              <a:spcAft>
+                <a:spcPts val="600"/>
+              </a:spcAft>
+            </a:pPr>
+            <a:r>
+              <a:rPr sz="2400" b="1">
+                <a:solidFill>
+                  <a:srgbClr val="FFFFFF"/>
+                </a:solidFill>
+                <a:latin typeface="微软雅黑"/>
+              </a:rPr>
+              <a:t>实测验收 · m23a_mlp</a:t>
+            </a:r>
+          </a:p>
+        </p:txBody>
+      </p:sp>
+      <p:sp>
+        <p:nvSpPr>
+          <p:cNvPr id="11" name="Rectangle 10"/>
+          <p:cNvSpPr/>
+          <p:nvPr/>
+        </p:nvSpPr>
+        <p:spPr>
+          <a:xfrm>
+            <a:off x="500000" y="6500000"/>
+            <a:ext cx="11100000" cy="20000"/>
+          </a:xfrm>
+          <a:prstGeom prst="rect">
+            <a:avLst/>
+          </a:prstGeom>
+          <a:solidFill>
+            <a:srgbClr val="C9D4EE"/>
+          </a:solidFill>
+          <a:ln>
+            <a:noFill/>
+          </a:ln>
+          <a:effectLst/>
+        </p:spPr>
+        <p:style>
+          <a:lnRef idx="1">
+            <a:schemeClr val="accent1"/>
+          </a:lnRef>
+          <a:fillRef idx="3">
+            <a:schemeClr val="accent1"/>
+          </a:fillRef>
+          <a:effectRef idx="2">
+            <a:schemeClr val="accent1"/>
+          </a:effectRef>
+          <a:fontRef idx="minor">
+            <a:schemeClr val="lt1"/>
+          </a:fontRef>
+        </p:style>
+        <p:txBody>
+          <a:bodyPr rtlCol="0" anchor="ctr"/>
+          <a:lstStyle/>
+          <a:p>
+            <a:pPr algn="ctr"/>
+          </a:p>
+        </p:txBody>
+      </p:sp>
+      <p:sp>
+        <p:nvSpPr>
+          <p:cNvPr id="12" name="TextBox 11"/>
+          <p:cNvSpPr txBox="1"/>
+          <p:nvPr/>
+        </p:nvSpPr>
+        <p:spPr>
+          <a:xfrm>
+            <a:off x="500000" y="6540000"/>
+            <a:ext cx="7000000" cy="300000"/>
+          </a:xfrm>
+          <a:prstGeom prst="rect">
+            <a:avLst/>
+          </a:prstGeom>
+          <a:noFill/>
+        </p:spPr>
+        <p:txBody>
+          <a:bodyPr wrap="square" anchor="t">
+            <a:spAutoFit/>
+          </a:bodyPr>
+          <a:lstStyle/>
+          <a:p>
+            <a:pPr algn="l">
+              <a:lnSpc>
+                <a:spcPct val="110000"/>
+              </a:lnSpc>
+              <a:spcAft>
+                <a:spcPts val="600"/>
+              </a:spcAft>
+            </a:pPr>
+            <a:r>
+              <a:rPr sz="1000" b="0">
+                <a:solidFill>
+                  <a:srgbClr val="8A97B5"/>
+                </a:solidFill>
+                <a:latin typeface="微软雅黑"/>
+              </a:rPr>
+              <a:t>两江智造集团 · AI应用基础48课时版</a:t>
+            </a:r>
+          </a:p>
+        </p:txBody>
+      </p:sp>
+      <p:sp>
+        <p:nvSpPr>
+          <p:cNvPr id="13" name="TextBox 12"/>
+          <p:cNvSpPr txBox="1"/>
+          <p:nvPr/>
+        </p:nvSpPr>
+        <p:spPr>
+          <a:xfrm>
+            <a:off x="10600000" y="6540000"/>
+            <a:ext cx="1000000" cy="300000"/>
+          </a:xfrm>
+          <a:prstGeom prst="rect">
+            <a:avLst/>
+          </a:prstGeom>
+          <a:noFill/>
+        </p:spPr>
+        <p:txBody>
+          <a:bodyPr wrap="square" anchor="t">
+            <a:spAutoFit/>
+          </a:bodyPr>
+          <a:lstStyle/>
+          <a:p>
+            <a:pPr algn="r">
+              <a:lnSpc>
+                <a:spcPct val="110000"/>
+              </a:lnSpc>
+              <a:spcAft>
+                <a:spcPts val="600"/>
+              </a:spcAft>
+            </a:pPr>
+            <a:r>
+              <a:rPr sz="1000" b="0">
+                <a:solidFill>
+                  <a:srgbClr val="8A97B5"/>
+                </a:solidFill>
+                <a:latin typeface="微软雅黑"/>
+              </a:rPr>
+              <a:t>40 / 68</a:t>
+            </a:r>
+          </a:p>
+        </p:txBody>
+      </p:sp>
+      <p:sp>
+        <p:nvSpPr>
+          <p:cNvPr id="14" name="Rectangle 13"/>
+          <p:cNvSpPr/>
+          <p:nvPr/>
+        </p:nvSpPr>
+        <p:spPr>
+          <a:xfrm>
+            <a:off x="0" y="1371600"/>
+            <a:ext cx="12188952" cy="713232"/>
+          </a:xfrm>
+          <a:prstGeom prst="rect">
+            <a:avLst/>
+          </a:prstGeom>
+          <a:solidFill>
+            <a:srgbClr val="F2F5F9"/>
+          </a:solidFill>
+          <a:ln>
+            <a:noFill/>
+          </a:ln>
+          <a:effectLst/>
+        </p:spPr>
+        <p:style>
+          <a:lnRef idx="1">
+            <a:schemeClr val="accent1"/>
+          </a:lnRef>
+          <a:fillRef idx="3">
+            <a:schemeClr val="accent1"/>
+          </a:fillRef>
+          <a:effectRef idx="2">
+            <a:schemeClr val="accent1"/>
+          </a:effectRef>
+          <a:fontRef idx="minor">
+            <a:schemeClr val="lt1"/>
+          </a:fontRef>
+        </p:style>
+        <p:txBody>
+          <a:bodyPr rtlCol="0" anchor="ctr" wrap="square"/>
+          <a:lstStyle/>
+          <a:p>
+            <a:pPr algn="ctr"/>
+          </a:p>
+        </p:txBody>
+      </p:sp>
+      <p:sp>
+        <p:nvSpPr>
+          <p:cNvPr id="15" name="TextBox 14"/>
+          <p:cNvSpPr txBox="1"/>
+          <p:nvPr/>
+        </p:nvSpPr>
+        <p:spPr>
+          <a:xfrm>
+            <a:off x="457200" y="1426464"/>
+            <a:ext cx="2651760" cy="566928"/>
+          </a:xfrm>
+          <a:prstGeom prst="rect">
+            <a:avLst/>
+          </a:prstGeom>
+          <a:noFill/>
+        </p:spPr>
+        <p:txBody>
+          <a:bodyPr wrap="square">
+            <a:spAutoFit/>
+          </a:bodyPr>
+          <a:lstStyle/>
+          <a:p>
+            <a:r>
+              <a:rPr sz="1400" b="1">
+                <a:solidFill>
+                  <a:srgbClr val="2E7D46"/>
+                </a:solidFill>
+                <a:latin typeface="微软雅黑"/>
+              </a:rPr>
+              <a:t>实测达成档位</a:t>
+            </a:r>
+          </a:p>
+          <a:p>
+            <a:r>
+              <a:rPr sz="1400" b="1">
+                <a:solidFill>
+                  <a:srgbClr val="2E7D46"/>
+                </a:solidFill>
+                <a:latin typeface="微软雅黑"/>
+              </a:rPr>
+              <a:t>优(A)</a:t>
+            </a:r>
+          </a:p>
+        </p:txBody>
+      </p:sp>
+      <p:sp>
+        <p:nvSpPr>
+          <p:cNvPr id="16" name="Rectangle 15"/>
+          <p:cNvSpPr/>
+          <p:nvPr/>
+        </p:nvSpPr>
+        <p:spPr>
+          <a:xfrm>
+            <a:off x="3200400" y="1426464"/>
+            <a:ext cx="1627632" cy="603504"/>
+          </a:xfrm>
+          <a:prstGeom prst="rect">
+            <a:avLst/>
+          </a:prstGeom>
+          <a:solidFill>
+            <a:srgbClr val="FFFFFF"/>
+          </a:solidFill>
+          <a:ln>
+            <a:solidFill>
+              <a:srgbClr val="D6DCE4"/>
+            </a:solidFill>
+          </a:ln>
+          <a:effectLst/>
+        </p:spPr>
+        <p:style>
+          <a:lnRef idx="1">
+            <a:schemeClr val="accent1"/>
+          </a:lnRef>
+          <a:fillRef idx="3">
+            <a:schemeClr val="accent1"/>
+          </a:fillRef>
+          <a:effectRef idx="2">
+            <a:schemeClr val="accent1"/>
+          </a:effectRef>
+          <a:fontRef idx="minor">
+            <a:schemeClr val="lt1"/>
+          </a:fontRef>
+        </p:style>
+        <p:txBody>
+          <a:bodyPr rtlCol="0" anchor="ctr" wrap="square"/>
+          <a:lstStyle/>
+          <a:p>
+            <a:pPr algn="ctr"/>
+          </a:p>
+        </p:txBody>
+      </p:sp>
+      <p:sp>
+        <p:nvSpPr>
+          <p:cNvPr id="17" name="TextBox 16"/>
+          <p:cNvSpPr txBox="1"/>
+          <p:nvPr/>
+        </p:nvSpPr>
+        <p:spPr>
+          <a:xfrm>
+            <a:off x="3246120" y="1463040"/>
+            <a:ext cx="1536192" cy="548640"/>
+          </a:xfrm>
+          <a:prstGeom prst="rect">
+            <a:avLst/>
+          </a:prstGeom>
+          <a:noFill/>
+        </p:spPr>
+        <p:txBody>
+          <a:bodyPr wrap="square">
+            <a:spAutoFit/>
+          </a:bodyPr>
+          <a:lstStyle/>
+          <a:p>
+            <a:r>
+              <a:rPr sz="900" b="0">
+                <a:solidFill>
+                  <a:srgbClr val="35506E"/>
+                </a:solidFill>
+                <a:latin typeface="微软雅黑"/>
+              </a:rPr>
+              <a:t>基线实测 acc 0.9400</a:t>
+            </a:r>
+          </a:p>
+        </p:txBody>
+      </p:sp>
+      <p:sp>
+        <p:nvSpPr>
+          <p:cNvPr id="18" name="Rectangle 17"/>
+          <p:cNvSpPr/>
+          <p:nvPr/>
+        </p:nvSpPr>
+        <p:spPr>
+          <a:xfrm>
+            <a:off x="4901184" y="1426464"/>
+            <a:ext cx="1627632" cy="603504"/>
+          </a:xfrm>
+          <a:prstGeom prst="rect">
+            <a:avLst/>
+          </a:prstGeom>
+          <a:solidFill>
+            <a:srgbClr val="FFFFFF"/>
+          </a:solidFill>
+          <a:ln>
+            <a:solidFill>
+              <a:srgbClr val="D6DCE4"/>
+            </a:solidFill>
+          </a:ln>
+          <a:effectLst/>
+        </p:spPr>
+        <p:style>
+          <a:lnRef idx="1">
+            <a:schemeClr val="accent1"/>
+          </a:lnRef>
+          <a:fillRef idx="3">
+            <a:schemeClr val="accent1"/>
+          </a:fillRef>
+          <a:effectRef idx="2">
+            <a:schemeClr val="accent1"/>
+          </a:effectRef>
+          <a:fontRef idx="minor">
+            <a:schemeClr val="lt1"/>
+          </a:fontRef>
+        </p:style>
+        <p:txBody>
+          <a:bodyPr rtlCol="0" anchor="ctr" wrap="square"/>
+          <a:lstStyle/>
+          <a:p>
+            <a:pPr algn="ctr"/>
+          </a:p>
+        </p:txBody>
+      </p:sp>
+      <p:sp>
+        <p:nvSpPr>
+          <p:cNvPr id="19" name="TextBox 18"/>
+          <p:cNvSpPr txBox="1"/>
+          <p:nvPr/>
+        </p:nvSpPr>
+        <p:spPr>
+          <a:xfrm>
+            <a:off x="4946904" y="1463040"/>
+            <a:ext cx="1536192" cy="548640"/>
+          </a:xfrm>
+          <a:prstGeom prst="rect">
+            <a:avLst/>
+          </a:prstGeom>
+          <a:noFill/>
+        </p:spPr>
+        <p:txBody>
+          <a:bodyPr wrap="square">
+            <a:spAutoFit/>
+          </a:bodyPr>
+          <a:lstStyle/>
+          <a:p>
+            <a:r>
+              <a:rPr sz="900" b="0">
+                <a:solidFill>
+                  <a:srgbClr val="35506E"/>
+                </a:solidFill>
+                <a:latin typeface="微软雅黑"/>
+              </a:rPr>
+              <a:t>最高 acc 0.9467</a:t>
+            </a:r>
+          </a:p>
+        </p:txBody>
+      </p:sp>
+      <p:sp>
+        <p:nvSpPr>
+          <p:cNvPr id="20" name="Rectangle 19"/>
+          <p:cNvSpPr/>
+          <p:nvPr/>
+        </p:nvSpPr>
+        <p:spPr>
+          <a:xfrm>
+            <a:off x="6601968" y="1426464"/>
+            <a:ext cx="1627632" cy="603504"/>
+          </a:xfrm>
+          <a:prstGeom prst="rect">
+            <a:avLst/>
+          </a:prstGeom>
+          <a:solidFill>
+            <a:srgbClr val="FFFFFF"/>
+          </a:solidFill>
+          <a:ln>
+            <a:solidFill>
+              <a:srgbClr val="D6DCE4"/>
+            </a:solidFill>
+          </a:ln>
+          <a:effectLst/>
+        </p:spPr>
+        <p:style>
+          <a:lnRef idx="1">
+            <a:schemeClr val="accent1"/>
+          </a:lnRef>
+          <a:fillRef idx="3">
+            <a:schemeClr val="accent1"/>
+          </a:fillRef>
+          <a:effectRef idx="2">
+            <a:schemeClr val="accent1"/>
+          </a:effectRef>
+          <a:fontRef idx="minor">
+            <a:schemeClr val="lt1"/>
+          </a:fontRef>
+        </p:style>
+        <p:txBody>
+          <a:bodyPr rtlCol="0" anchor="ctr" wrap="square"/>
+          <a:lstStyle/>
+          <a:p>
+            <a:pPr algn="ctr"/>
+          </a:p>
+        </p:txBody>
+      </p:sp>
+      <p:sp>
+        <p:nvSpPr>
+          <p:cNvPr id="21" name="TextBox 20"/>
+          <p:cNvSpPr txBox="1"/>
+          <p:nvPr/>
+        </p:nvSpPr>
+        <p:spPr>
+          <a:xfrm>
+            <a:off x="6647688" y="1463040"/>
+            <a:ext cx="1536192" cy="548640"/>
+          </a:xfrm>
+          <a:prstGeom prst="rect">
+            <a:avLst/>
+          </a:prstGeom>
+          <a:noFill/>
+        </p:spPr>
+        <p:txBody>
+          <a:bodyPr wrap="square">
+            <a:spAutoFit/>
+          </a:bodyPr>
+          <a:lstStyle/>
+          <a:p>
+            <a:r>
+              <a:rPr sz="900" b="0">
+                <a:solidFill>
+                  <a:srgbClr val="35506E"/>
+                </a:solidFill>
+                <a:latin typeface="微软雅黑"/>
+              </a:rPr>
+              <a:t>PNG 实测 48810B（下限 1000）</a:t>
+            </a:r>
+          </a:p>
+        </p:txBody>
+      </p:sp>
+      <p:sp>
+        <p:nvSpPr>
+          <p:cNvPr id="22" name="Rectangle 21"/>
+          <p:cNvSpPr/>
+          <p:nvPr/>
+        </p:nvSpPr>
+        <p:spPr>
+          <a:xfrm>
+            <a:off x="8302752" y="1426464"/>
+            <a:ext cx="1627632" cy="603504"/>
+          </a:xfrm>
+          <a:prstGeom prst="rect">
+            <a:avLst/>
+          </a:prstGeom>
+          <a:solidFill>
+            <a:srgbClr val="FFFFFF"/>
+          </a:solidFill>
+          <a:ln>
+            <a:solidFill>
+              <a:srgbClr val="D6DCE4"/>
+            </a:solidFill>
+          </a:ln>
+          <a:effectLst/>
+        </p:spPr>
+        <p:style>
+          <a:lnRef idx="1">
+            <a:schemeClr val="accent1"/>
+          </a:lnRef>
+          <a:fillRef idx="3">
+            <a:schemeClr val="accent1"/>
+          </a:fillRef>
+          <a:effectRef idx="2">
+            <a:schemeClr val="accent1"/>
+          </a:effectRef>
+          <a:fontRef idx="minor">
+            <a:schemeClr val="lt1"/>
+          </a:fontRef>
+        </p:style>
+        <p:txBody>
+          <a:bodyPr rtlCol="0" anchor="ctr" wrap="square"/>
+          <a:lstStyle/>
+          <a:p>
+            <a:pPr algn="ctr"/>
+          </a:p>
+        </p:txBody>
+      </p:sp>
+      <p:sp>
+        <p:nvSpPr>
+          <p:cNvPr id="23" name="TextBox 22"/>
+          <p:cNvSpPr txBox="1"/>
+          <p:nvPr/>
+        </p:nvSpPr>
+        <p:spPr>
+          <a:xfrm>
+            <a:off x="8348472" y="1463040"/>
+            <a:ext cx="1536192" cy="548640"/>
+          </a:xfrm>
+          <a:prstGeom prst="rect">
+            <a:avLst/>
+          </a:prstGeom>
+          <a:noFill/>
+        </p:spPr>
+        <p:txBody>
+          <a:bodyPr wrap="square">
+            <a:spAutoFit/>
+          </a:bodyPr>
+          <a:lstStyle/>
+          <a:p>
+            <a:r>
+              <a:rPr sz="900" b="0">
+                <a:solidFill>
+                  <a:srgbClr val="35506E"/>
+                </a:solidFill>
+                <a:latin typeface="微软雅黑"/>
+              </a:rPr>
+              <a:t>无 Dropout gap 0.6744 → 合规臂 Dropout 0.1：</a:t>
+            </a:r>
+          </a:p>
+        </p:txBody>
+      </p:sp>
+      <p:sp>
+        <p:nvSpPr>
+          <p:cNvPr id="24" name="Rectangle 23"/>
+          <p:cNvSpPr/>
+          <p:nvPr/>
+        </p:nvSpPr>
+        <p:spPr>
+          <a:xfrm>
+            <a:off x="10003536" y="1426464"/>
+            <a:ext cx="1627632" cy="603504"/>
+          </a:xfrm>
+          <a:prstGeom prst="rect">
+            <a:avLst/>
+          </a:prstGeom>
+          <a:solidFill>
+            <a:srgbClr val="FFFFFF"/>
+          </a:solidFill>
+          <a:ln>
+            <a:solidFill>
+              <a:srgbClr val="D6DCE4"/>
+            </a:solidFill>
+          </a:ln>
+          <a:effectLst/>
+        </p:spPr>
+        <p:style>
+          <a:lnRef idx="1">
+            <a:schemeClr val="accent1"/>
+          </a:lnRef>
+          <a:fillRef idx="3">
+            <a:schemeClr val="accent1"/>
+          </a:fillRef>
+          <a:effectRef idx="2">
+            <a:schemeClr val="accent1"/>
+          </a:effectRef>
+          <a:fontRef idx="minor">
+            <a:schemeClr val="lt1"/>
+          </a:fontRef>
+        </p:style>
+        <p:txBody>
+          <a:bodyPr rtlCol="0" anchor="ctr" wrap="square"/>
+          <a:lstStyle/>
+          <a:p>
+            <a:pPr algn="ctr"/>
+          </a:p>
+        </p:txBody>
+      </p:sp>
+      <p:sp>
+        <p:nvSpPr>
+          <p:cNvPr id="25" name="TextBox 24"/>
+          <p:cNvSpPr txBox="1"/>
+          <p:nvPr/>
+        </p:nvSpPr>
+        <p:spPr>
+          <a:xfrm>
+            <a:off x="10049256" y="1463040"/>
+            <a:ext cx="1536192" cy="548640"/>
+          </a:xfrm>
+          <a:prstGeom prst="rect">
+            <a:avLst/>
+          </a:prstGeom>
+          <a:noFill/>
+        </p:spPr>
+        <p:txBody>
+          <a:bodyPr wrap="square">
+            <a:spAutoFit/>
+          </a:bodyPr>
+          <a:lstStyle/>
+          <a:p>
+            <a:r>
+              <a:rPr sz="900" b="0">
+                <a:solidFill>
+                  <a:srgbClr val="35506E"/>
+                </a:solidFill>
+                <a:latin typeface="微软雅黑"/>
+              </a:rPr>
+              <a:t>性价比最优结构 [64, 32]（params=4130）</a:t>
+            </a:r>
+          </a:p>
+        </p:txBody>
+      </p:sp>
+      <p:graphicFrame>
+        <p:nvGraphicFramePr>
+          <p:cNvPr id="26" name="Table 25"/>
+          <p:cNvGraphicFramePr>
+            <a:graphicFrameLocks noGrp="1"/>
+          </p:cNvGraphicFramePr>
+          <p:nvPr/>
+        </p:nvGraphicFramePr>
+        <p:xfrm>
+          <a:off x="457200" y="2212848"/>
+          <a:ext cx="11274552" cy="2834640"/>
+        </p:xfrm>
+        <a:graphic>
+          <a:graphicData uri="http://schemas.openxmlformats.org/drawingml/2006/table">
+            <a:tbl>
+              <a:tblPr firstRow="1" bandRow="1">
+                <a:tableStyleId>{5C22544A-7EE6-4342-B048-85BDC9FD1C3A}</a:tableStyleId>
+              </a:tblPr>
+              <a:tblGrid>
+                <a:gridCol w="1188720"/>
+                <a:gridCol w="5120640"/>
+                <a:gridCol w="3886200"/>
+                <a:gridCol w="1078992"/>
+              </a:tblGrid>
+              <a:tr h="566928">
+                <a:tc>
+                  <a:txBody>
+                    <a:bodyPr/>
+                    <a:lstStyle/>
+                    <a:p>
+                      <a:r>
+                        <a:rPr sz="1050" b="1">
+                          <a:solidFill>
+                            <a:srgbClr val="FFFFFF"/>
+                          </a:solidFill>
+                          <a:latin typeface="微软雅黑"/>
+                        </a:rPr>
+                        <a:t>档位</a:t>
+                      </a:r>
+                    </a:p>
+                  </a:txBody>
+                  <a:tcPr>
+                    <a:solidFill>
+                      <a:srgbClr val="010328"/>
+                    </a:solidFill>
+                  </a:tcPr>
+                </a:tc>
+                <a:tc>
+                  <a:txBody>
+                    <a:bodyPr/>
+                    <a:lstStyle/>
+                    <a:p>
+                      <a:r>
+                        <a:rPr sz="1050" b="1">
+                          <a:solidFill>
+                            <a:srgbClr val="FFFFFF"/>
+                          </a:solidFill>
+                          <a:latin typeface="微软雅黑"/>
+                        </a:rPr>
+                        <a:t>工单验收标准（原文）</a:t>
+                      </a:r>
+                    </a:p>
+                  </a:txBody>
+                  <a:tcPr>
+                    <a:solidFill>
+                      <a:srgbClr val="010328"/>
+                    </a:solidFill>
+                  </a:tcPr>
+                </a:tc>
+                <a:tc>
+                  <a:txBody>
+                    <a:bodyPr/>
+                    <a:lstStyle/>
+                    <a:p>
+                      <a:r>
+                        <a:rPr sz="1050" b="1">
+                          <a:solidFill>
+                            <a:srgbClr val="FFFFFF"/>
+                          </a:solidFill>
+                          <a:latin typeface="微软雅黑"/>
+                        </a:rPr>
+                        <a:t>本次实测判定</a:t>
+                      </a:r>
+                    </a:p>
+                  </a:txBody>
+                  <a:tcPr>
+                    <a:solidFill>
+                      <a:srgbClr val="010328"/>
+                    </a:solidFill>
+                  </a:tcPr>
+                </a:tc>
+                <a:tc>
+                  <a:txBody>
+                    <a:bodyPr/>
+                    <a:lstStyle/>
+                    <a:p>
+                      <a:r>
+                        <a:rPr sz="1050" b="1">
+                          <a:solidFill>
+                            <a:srgbClr val="FFFFFF"/>
+                          </a:solidFill>
+                          <a:latin typeface="微软雅黑"/>
+                        </a:rPr>
+                        <a:t>判定</a:t>
+                      </a:r>
+                    </a:p>
+                  </a:txBody>
+                  <a:tcPr>
+                    <a:solidFill>
+                      <a:srgbClr val="010328"/>
+                    </a:solidFill>
+                  </a:tcPr>
+                </a:tc>
+              </a:tr>
+              <a:tr h="566928">
+                <a:tc>
+                  <a:txBody>
+                    <a:bodyPr/>
+                    <a:lstStyle/>
+                    <a:p>
+                      <a:r>
+                        <a:rPr sz="1000" b="1">
+                          <a:solidFill>
+                            <a:srgbClr val="2B2F36"/>
+                          </a:solidFill>
+                          <a:latin typeface="微软雅黑"/>
+                        </a:rPr>
+                        <a:t>及格(D)</a:t>
+                      </a:r>
+                    </a:p>
+                  </a:txBody>
+                  <a:tcPr>
+                    <a:solidFill>
+                      <a:srgbClr val="FFFFFF"/>
+                    </a:solidFill>
+                  </a:tcPr>
+                </a:tc>
+                <a:tc>
+                  <a:txBody>
+                    <a:bodyPr/>
+                    <a:lstStyle/>
+                    <a:p>
+                      <a:r>
+                        <a:rPr sz="950" b="0">
+                          <a:solidFill>
+                            <a:srgbClr val="2B2F36"/>
+                          </a:solidFill>
+                          <a:latin typeface="微软雅黑"/>
+                        </a:rPr>
+                        <a:t>模板可运行出指标；代码规范率≥70%</a:t>
+                      </a:r>
+                    </a:p>
+                  </a:txBody>
+                  <a:tcPr>
+                    <a:solidFill>
+                      <a:srgbClr val="FFFFFF"/>
+                    </a:solidFill>
+                  </a:tcPr>
+                </a:tc>
+                <a:tc>
+                  <a:txBody>
+                    <a:bodyPr/>
+                    <a:lstStyle/>
+                    <a:p>
+                      <a:r>
+                        <a:rPr sz="950" b="0">
+                          <a:solidFill>
+                            <a:srgbClr val="2B2F36"/>
+                          </a:solidFill>
+                          <a:latin typeface="微软雅黑"/>
+                        </a:rPr>
+                        <a:t>规范率门槛≥70% [达标] ｜ 功能OK</a:t>
+                      </a:r>
+                    </a:p>
+                  </a:txBody>
+                  <a:tcPr>
+                    <a:solidFill>
+                      <a:srgbClr val="FFFFFF"/>
+                    </a:solidFill>
+                  </a:tcPr>
+                </a:tc>
+                <a:tc>
+                  <a:txBody>
+                    <a:bodyPr/>
+                    <a:lstStyle/>
+                    <a:p>
+                      <a:r>
+                        <a:rPr sz="1000" b="1">
+                          <a:solidFill>
+                            <a:srgbClr val="2E7D46"/>
+                          </a:solidFill>
+                          <a:latin typeface="微软雅黑"/>
+                        </a:rPr>
+                        <a:t>✓ 达标</a:t>
+                      </a:r>
+                    </a:p>
+                  </a:txBody>
+                  <a:tcPr>
+                    <a:solidFill>
+                      <a:srgbClr val="FFFFFF"/>
+                    </a:solidFill>
+                  </a:tcPr>
+                </a:tc>
+              </a:tr>
+              <a:tr h="566928">
+                <a:tc>
+                  <a:txBody>
+                    <a:bodyPr/>
+                    <a:lstStyle/>
+                    <a:p>
+                      <a:r>
+                        <a:rPr sz="1000" b="1">
+                          <a:solidFill>
+                            <a:srgbClr val="2B2F36"/>
+                          </a:solidFill>
+                          <a:latin typeface="微软雅黑"/>
+                        </a:rPr>
+                        <a:t>良好(C)</a:t>
+                      </a:r>
+                    </a:p>
+                  </a:txBody>
+                  <a:tcPr>
+                    <a:solidFill>
+                      <a:srgbClr val="F7F9FB"/>
+                    </a:solidFill>
+                  </a:tcPr>
+                </a:tc>
+                <a:tc>
+                  <a:txBody>
+                    <a:bodyPr/>
+                    <a:lstStyle/>
+                    <a:p>
+                      <a:r>
+                        <a:rPr sz="950" b="0">
+                          <a:solidFill>
+                            <a:srgbClr val="2B2F36"/>
+                          </a:solidFill>
+                          <a:latin typeface="微软雅黑"/>
+                        </a:rPr>
+                        <a:t>准确率≥75%图完整</a:t>
+                      </a:r>
+                    </a:p>
+                  </a:txBody>
+                  <a:tcPr>
+                    <a:solidFill>
+                      <a:srgbClr val="F7F9FB"/>
+                    </a:solidFill>
+                  </a:tcPr>
+                </a:tc>
+                <a:tc>
+                  <a:txBody>
+                    <a:bodyPr/>
+                    <a:lstStyle/>
+                    <a:p>
+                      <a:r>
+                        <a:rPr sz="950" b="0">
+                          <a:solidFill>
+                            <a:srgbClr val="2B2F36"/>
+                          </a:solidFill>
+                          <a:latin typeface="微软雅黑"/>
+                        </a:rPr>
+                        <a:t>规范率门槛≥70% [达标] ｜ 功能OK</a:t>
+                      </a:r>
+                    </a:p>
+                  </a:txBody>
+                  <a:tcPr>
+                    <a:solidFill>
+                      <a:srgbClr val="F7F9FB"/>
+                    </a:solidFill>
+                  </a:tcPr>
+                </a:tc>
+                <a:tc>
+                  <a:txBody>
+                    <a:bodyPr/>
+                    <a:lstStyle/>
+                    <a:p>
+                      <a:r>
+                        <a:rPr sz="1000" b="1">
+                          <a:solidFill>
+                            <a:srgbClr val="2E7D46"/>
+                          </a:solidFill>
+                          <a:latin typeface="微软雅黑"/>
+                        </a:rPr>
+                        <a:t>✓ 达标</a:t>
+                      </a:r>
+                    </a:p>
+                  </a:txBody>
+                  <a:tcPr>
+                    <a:solidFill>
+                      <a:srgbClr val="F7F9FB"/>
+                    </a:solidFill>
+                  </a:tcPr>
+                </a:tc>
+              </a:tr>
+              <a:tr h="566928">
+                <a:tc>
+                  <a:txBody>
+                    <a:bodyPr/>
+                    <a:lstStyle/>
+                    <a:p>
+                      <a:r>
+                        <a:rPr sz="1000" b="1">
+                          <a:solidFill>
+                            <a:srgbClr val="2B2F36"/>
+                          </a:solidFill>
+                          <a:latin typeface="微软雅黑"/>
+                        </a:rPr>
+                        <a:t>优秀(B)</a:t>
+                      </a:r>
+                    </a:p>
+                  </a:txBody>
+                  <a:tcPr>
+                    <a:solidFill>
+                      <a:srgbClr val="FFFFFF"/>
+                    </a:solidFill>
+                  </a:tcPr>
+                </a:tc>
+                <a:tc>
+                  <a:txBody>
+                    <a:bodyPr/>
+                    <a:lstStyle/>
+                    <a:p>
+                      <a:r>
+                        <a:rPr sz="950" b="0">
+                          <a:solidFill>
+                            <a:srgbClr val="2B2F36"/>
+                          </a:solidFill>
+                          <a:latin typeface="微软雅黑"/>
+                        </a:rPr>
+                        <a:t>gap收窄且指标不降；决策记录完整</a:t>
+                      </a:r>
+                    </a:p>
+                  </a:txBody>
+                  <a:tcPr>
+                    <a:solidFill>
+                      <a:srgbClr val="FFFFFF"/>
+                    </a:solidFill>
+                  </a:tcPr>
+                </a:tc>
+                <a:tc>
+                  <a:txBody>
+                    <a:bodyPr/>
+                    <a:lstStyle/>
+                    <a:p>
+                      <a:r>
+                        <a:rPr sz="950" b="0">
+                          <a:solidFill>
+                            <a:srgbClr val="2B2F36"/>
+                          </a:solidFill>
+                          <a:latin typeface="微软雅黑"/>
+                        </a:rPr>
+                        <a:t>规范率门槛≥70% [达标] ｜ 功能OK</a:t>
+                      </a:r>
+                    </a:p>
+                  </a:txBody>
+                  <a:tcPr>
+                    <a:solidFill>
+                      <a:srgbClr val="FFFFFF"/>
+                    </a:solidFill>
+                  </a:tcPr>
+                </a:tc>
+                <a:tc>
+                  <a:txBody>
+                    <a:bodyPr/>
+                    <a:lstStyle/>
+                    <a:p>
+                      <a:r>
+                        <a:rPr sz="1000" b="1">
+                          <a:solidFill>
+                            <a:srgbClr val="2E7D46"/>
+                          </a:solidFill>
+                          <a:latin typeface="微软雅黑"/>
+                        </a:rPr>
+                        <a:t>✓ 达标</a:t>
+                      </a:r>
+                    </a:p>
+                  </a:txBody>
+                  <a:tcPr>
+                    <a:solidFill>
+                      <a:srgbClr val="FFFFFF"/>
+                    </a:solidFill>
+                  </a:tcPr>
+                </a:tc>
+              </a:tr>
+              <a:tr h="566928">
+                <a:tc>
+                  <a:txBody>
+                    <a:bodyPr/>
+                    <a:lstStyle/>
+                    <a:p>
+                      <a:r>
+                        <a:rPr sz="1000" b="1">
+                          <a:solidFill>
+                            <a:srgbClr val="2B2F36"/>
+                          </a:solidFill>
+                          <a:latin typeface="微软雅黑"/>
+                        </a:rPr>
+                        <a:t>优(A)</a:t>
+                      </a:r>
+                    </a:p>
+                  </a:txBody>
+                  <a:tcPr>
+                    <a:solidFill>
+                      <a:srgbClr val="F7F9FB"/>
+                    </a:solidFill>
+                  </a:tcPr>
+                </a:tc>
+                <a:tc>
+                  <a:txBody>
+                    <a:bodyPr/>
+                    <a:lstStyle/>
+                    <a:p>
+                      <a:r>
+                        <a:rPr sz="950" b="0">
+                          <a:solidFill>
+                            <a:srgbClr val="2B2F36"/>
+                          </a:solidFill>
+                          <a:latin typeface="微软雅黑"/>
+                        </a:rPr>
+                        <a:t>找到性价比最优结构</a:t>
+                      </a:r>
+                    </a:p>
+                  </a:txBody>
+                  <a:tcPr>
+                    <a:solidFill>
+                      <a:srgbClr val="F7F9FB"/>
+                    </a:solidFill>
+                  </a:tcPr>
+                </a:tc>
+                <a:tc>
+                  <a:txBody>
+                    <a:bodyPr/>
+                    <a:lstStyle/>
+                    <a:p>
+                      <a:r>
+                        <a:rPr sz="950" b="0">
+                          <a:solidFill>
+                            <a:srgbClr val="2B2F36"/>
+                          </a:solidFill>
+                          <a:latin typeface="微软雅黑"/>
+                        </a:rPr>
+                        <a:t>规范率门槛≥70% [达标] ｜ 功能OK</a:t>
+                      </a:r>
+                    </a:p>
+                  </a:txBody>
+                  <a:tcPr>
+                    <a:solidFill>
+                      <a:srgbClr val="F7F9FB"/>
+                    </a:solidFill>
+                  </a:tcPr>
+                </a:tc>
+                <a:tc>
+                  <a:txBody>
+                    <a:bodyPr/>
+                    <a:lstStyle/>
+                    <a:p>
+                      <a:r>
+                        <a:rPr sz="1000" b="1">
+                          <a:solidFill>
+                            <a:srgbClr val="2E7D46"/>
+                          </a:solidFill>
+                          <a:latin typeface="微软雅黑"/>
+                        </a:rPr>
+                        <a:t>✓ 达标</a:t>
+                      </a:r>
+                    </a:p>
+                  </a:txBody>
+                  <a:tcPr>
+                    <a:solidFill>
+                      <a:srgbClr val="F7F9FB"/>
+                    </a:solidFill>
+                  </a:tcPr>
+                </a:tc>
+              </a:tr>
+            </a:tbl>
+          </a:graphicData>
+        </a:graphic>
+      </p:graphicFrame>
+      <p:sp>
+        <p:nvSpPr>
+          <p:cNvPr id="27" name="Rectangle 26"/>
+          <p:cNvSpPr/>
+          <p:nvPr/>
+        </p:nvSpPr>
+        <p:spPr>
+          <a:xfrm>
+            <a:off x="457200" y="5138928"/>
+            <a:ext cx="11274552" cy="1261872"/>
+          </a:xfrm>
+          <a:prstGeom prst="rect">
+            <a:avLst/>
+          </a:prstGeom>
+          <a:solidFill>
+            <a:srgbClr val="FFF7E8"/>
+          </a:solidFill>
+          <a:ln>
+            <a:solidFill>
+              <a:srgbClr val="E8C88A"/>
+            </a:solidFill>
+          </a:ln>
+          <a:effectLst/>
+        </p:spPr>
+        <p:style>
+          <a:lnRef idx="1">
+            <a:schemeClr val="accent1"/>
+          </a:lnRef>
+          <a:fillRef idx="3">
+            <a:schemeClr val="accent1"/>
+          </a:fillRef>
+          <a:effectRef idx="2">
+            <a:schemeClr val="accent1"/>
+          </a:effectRef>
+          <a:fontRef idx="minor">
+            <a:schemeClr val="lt1"/>
+          </a:fontRef>
+        </p:style>
+        <p:txBody>
+          <a:bodyPr rtlCol="0" anchor="ctr" wrap="square"/>
+          <a:lstStyle/>
+          <a:p>
+            <a:pPr algn="ctr"/>
+          </a:p>
+        </p:txBody>
+      </p:sp>
+      <p:sp>
+        <p:nvSpPr>
+          <p:cNvPr id="28" name="TextBox 27"/>
+          <p:cNvSpPr txBox="1"/>
+          <p:nvPr/>
+        </p:nvSpPr>
+        <p:spPr>
+          <a:xfrm>
+            <a:off x="621792" y="5212080"/>
+            <a:ext cx="10927080" cy="1133856"/>
+          </a:xfrm>
+          <a:prstGeom prst="rect">
+            <a:avLst/>
+          </a:prstGeom>
+          <a:noFill/>
+        </p:spPr>
+        <p:txBody>
+          <a:bodyPr wrap="square">
+            <a:spAutoFit/>
+          </a:bodyPr>
+          <a:lstStyle/>
+          <a:p>
+            <a:r>
+              <a:rPr sz="950" b="0">
+                <a:solidFill>
+                  <a:srgbClr val="6B4E16"/>
+                </a:solidFill>
+                <a:latin typeface="微软雅黑"/>
+              </a:rPr>
+              <a:t>人工答辩项 0 条：四档门槛均由代码实测判定</a:t>
+            </a:r>
+          </a:p>
+          <a:p>
+            <a:r>
+              <a:rPr sz="950" b="0">
+                <a:solidFill>
+                  <a:srgbClr val="6B4E16"/>
+                </a:solidFill>
+                <a:latin typeface="微软雅黑"/>
+              </a:rPr>
+              <a:t>档位是算出来的：判定值由 run.py 本次真跑产生；工单未给数字的门槛在报告里标注为「兜底口径·非工单数字」。</a:t>
+            </a:r>
+          </a:p>
+          <a:p>
+            <a:r>
+              <a:rPr sz="950" b="0">
+                <a:solidFill>
+                  <a:srgbClr val="6B4E16"/>
+                </a:solidFill>
+                <a:latin typeface="微软雅黑"/>
+              </a:rPr>
+              <a:t>实测值共 7 项，本页只列前 5 项，其余见下页 report.txt 截图。</a:t>
+            </a:r>
+          </a:p>
+        </p:txBody>
+      </p:sp>
+    </p:spTree>
+  </p:cSld>
+  <p:clrMapOvr>
+    <a:masterClrMapping/>
+  </p:clrMapOvr>
+</p:sld>
+</file>
+
+<file path=ppt/slides/slide67.xml><?xml version="1.0" encoding="utf-8"?>
+<p:sld xmlns:a="http://schemas.openxmlformats.org/drawingml/2006/main" xmlns:p="http://schemas.openxmlformats.org/presentationml/2006/main" xmlns:r="http://schemas.openxmlformats.org/officeDocument/2006/relationships">
+  <p:cSld>
+    <p:spTree>
+      <p:nvGrpSpPr>
+        <p:cNvPr id="1" name=""/>
+        <p:cNvGrpSpPr/>
+        <p:nvPr/>
+      </p:nvGrpSpPr>
+      <p:grpSpPr/>
+      <p:sp>
+        <p:nvSpPr>
+          <p:cNvPr id="2" name="Rectangle 1"/>
+          <p:cNvSpPr/>
+          <p:nvPr/>
+        </p:nvSpPr>
+        <p:spPr>
+          <a:xfrm>
+            <a:off x="0" y="0"/>
+            <a:ext cx="12192000" cy="1150000"/>
+          </a:xfrm>
+          <a:prstGeom prst="rect">
+            <a:avLst/>
+          </a:prstGeom>
+          <a:solidFill>
+            <a:srgbClr val="010328"/>
+          </a:solidFill>
+          <a:ln>
+            <a:noFill/>
+          </a:ln>
+          <a:effectLst/>
+        </p:spPr>
+        <p:style>
+          <a:lnRef idx="1">
+            <a:schemeClr val="accent1"/>
+          </a:lnRef>
+          <a:fillRef idx="3">
+            <a:schemeClr val="accent1"/>
+          </a:fillRef>
+          <a:effectRef idx="2">
+            <a:schemeClr val="accent1"/>
+          </a:effectRef>
+          <a:fontRef idx="minor">
+            <a:schemeClr val="lt1"/>
+          </a:fontRef>
+        </p:style>
+        <p:txBody>
+          <a:bodyPr rtlCol="0" anchor="ctr"/>
+          <a:lstStyle/>
+          <a:p>
+            <a:pPr algn="ctr"/>
+          </a:p>
+        </p:txBody>
+      </p:sp>
+      <p:sp>
+        <p:nvSpPr>
+          <p:cNvPr id="3" name="Rectangle 2"/>
+          <p:cNvSpPr/>
+          <p:nvPr/>
+        </p:nvSpPr>
+        <p:spPr>
+          <a:xfrm>
+            <a:off x="0" y="1150000"/>
+            <a:ext cx="2600000" cy="70000"/>
+          </a:xfrm>
+          <a:prstGeom prst="rect">
+            <a:avLst/>
+          </a:prstGeom>
+          <a:solidFill>
+            <a:srgbClr val="F5670F"/>
+          </a:solidFill>
+          <a:ln>
+            <a:noFill/>
+          </a:ln>
+          <a:effectLst/>
+        </p:spPr>
+        <p:style>
+          <a:lnRef idx="1">
+            <a:schemeClr val="accent1"/>
+          </a:lnRef>
+          <a:fillRef idx="3">
+            <a:schemeClr val="accent1"/>
+          </a:fillRef>
+          <a:effectRef idx="2">
+            <a:schemeClr val="accent1"/>
+          </a:effectRef>
+          <a:fontRef idx="minor">
+            <a:schemeClr val="lt1"/>
+          </a:fontRef>
+        </p:style>
+        <p:txBody>
+          <a:bodyPr rtlCol="0" anchor="ctr"/>
+          <a:lstStyle/>
+          <a:p>
+            <a:pPr algn="ctr"/>
+          </a:p>
+        </p:txBody>
+      </p:sp>
+      <p:sp>
+        <p:nvSpPr>
+          <p:cNvPr id="4" name="TextBox 3"/>
+          <p:cNvSpPr txBox="1"/>
+          <p:nvPr/>
+        </p:nvSpPr>
+        <p:spPr>
+          <a:xfrm>
+            <a:off x="700000" y="300000"/>
+            <a:ext cx="10792000" cy="700000"/>
+          </a:xfrm>
+          <a:prstGeom prst="rect">
+            <a:avLst/>
+          </a:prstGeom>
+          <a:noFill/>
+        </p:spPr>
+        <p:txBody>
+          <a:bodyPr wrap="square" anchor="t">
+            <a:spAutoFit/>
+          </a:bodyPr>
+          <a:lstStyle/>
+          <a:p>
+            <a:pPr algn="l">
+              <a:lnSpc>
+                <a:spcPct val="110000"/>
+              </a:lnSpc>
+              <a:spcAft>
+                <a:spcPts val="600"/>
+              </a:spcAft>
+            </a:pPr>
+            <a:r>
+              <a:rPr sz="2400" b="1">
+                <a:solidFill>
+                  <a:srgbClr val="FFFFFF"/>
+                </a:solidFill>
+                <a:latin typeface="微软雅黑"/>
+              </a:rPr>
+              <a:t>实跑截图证据 · m23a_mlp</a:t>
+            </a:r>
+          </a:p>
+        </p:txBody>
+      </p:sp>
+      <p:sp>
+        <p:nvSpPr>
+          <p:cNvPr id="11" name="Rectangle 10"/>
+          <p:cNvSpPr/>
+          <p:nvPr/>
+        </p:nvSpPr>
+        <p:spPr>
+          <a:xfrm>
+            <a:off x="500000" y="6500000"/>
+            <a:ext cx="11100000" cy="20000"/>
+          </a:xfrm>
+          <a:prstGeom prst="rect">
+            <a:avLst/>
+          </a:prstGeom>
+          <a:solidFill>
+            <a:srgbClr val="C9D4EE"/>
+          </a:solidFill>
+          <a:ln>
+            <a:noFill/>
+          </a:ln>
+          <a:effectLst/>
+        </p:spPr>
+        <p:style>
+          <a:lnRef idx="1">
+            <a:schemeClr val="accent1"/>
+          </a:lnRef>
+          <a:fillRef idx="3">
+            <a:schemeClr val="accent1"/>
+          </a:fillRef>
+          <a:effectRef idx="2">
+            <a:schemeClr val="accent1"/>
+          </a:effectRef>
+          <a:fontRef idx="minor">
+            <a:schemeClr val="lt1"/>
+          </a:fontRef>
+        </p:style>
+        <p:txBody>
+          <a:bodyPr rtlCol="0" anchor="ctr"/>
+          <a:lstStyle/>
+          <a:p>
+            <a:pPr algn="ctr"/>
+          </a:p>
+        </p:txBody>
+      </p:sp>
+      <p:sp>
+        <p:nvSpPr>
+          <p:cNvPr id="12" name="TextBox 11"/>
+          <p:cNvSpPr txBox="1"/>
+          <p:nvPr/>
+        </p:nvSpPr>
+        <p:spPr>
+          <a:xfrm>
+            <a:off x="500000" y="6540000"/>
+            <a:ext cx="7000000" cy="300000"/>
+          </a:xfrm>
+          <a:prstGeom prst="rect">
+            <a:avLst/>
+          </a:prstGeom>
+          <a:noFill/>
+        </p:spPr>
+        <p:txBody>
+          <a:bodyPr wrap="square" anchor="t">
+            <a:spAutoFit/>
+          </a:bodyPr>
+          <a:lstStyle/>
+          <a:p>
+            <a:pPr algn="l">
+              <a:lnSpc>
+                <a:spcPct val="110000"/>
+              </a:lnSpc>
+              <a:spcAft>
+                <a:spcPts val="600"/>
+              </a:spcAft>
+            </a:pPr>
+            <a:r>
+              <a:rPr sz="1000" b="0">
+                <a:solidFill>
+                  <a:srgbClr val="8A97B5"/>
+                </a:solidFill>
+                <a:latin typeface="微软雅黑"/>
+              </a:rPr>
+              <a:t>两江智造集团 · AI应用基础48课时版</a:t>
+            </a:r>
+          </a:p>
+        </p:txBody>
+      </p:sp>
+      <p:sp>
+        <p:nvSpPr>
+          <p:cNvPr id="13" name="TextBox 12"/>
+          <p:cNvSpPr txBox="1"/>
+          <p:nvPr/>
+        </p:nvSpPr>
+        <p:spPr>
+          <a:xfrm>
+            <a:off x="10600000" y="6540000"/>
+            <a:ext cx="1000000" cy="300000"/>
+          </a:xfrm>
+          <a:prstGeom prst="rect">
+            <a:avLst/>
+          </a:prstGeom>
+          <a:noFill/>
+        </p:spPr>
+        <p:txBody>
+          <a:bodyPr wrap="square" anchor="t">
+            <a:spAutoFit/>
+          </a:bodyPr>
+          <a:lstStyle/>
+          <a:p>
+            <a:pPr algn="r">
+              <a:lnSpc>
+                <a:spcPct val="110000"/>
+              </a:lnSpc>
+              <a:spcAft>
+                <a:spcPts val="600"/>
+              </a:spcAft>
+            </a:pPr>
+            <a:r>
+              <a:rPr sz="1000" b="0">
+                <a:solidFill>
+                  <a:srgbClr val="8A97B5"/>
+                </a:solidFill>
+                <a:latin typeface="微软雅黑"/>
+              </a:rPr>
+              <a:t>41 / 68</a:t>
+            </a:r>
+          </a:p>
+        </p:txBody>
+      </p:sp>
+      <p:sp>
+        <p:nvSpPr>
+          <p:cNvPr id="14" name="Rectangle 13"/>
+          <p:cNvSpPr/>
+          <p:nvPr/>
+        </p:nvSpPr>
+        <p:spPr>
+          <a:xfrm>
+            <a:off x="457200" y="1481328"/>
+            <a:ext cx="5486400" cy="2304288"/>
+          </a:xfrm>
+          <a:prstGeom prst="rect">
+            <a:avLst/>
+          </a:prstGeom>
+          <a:solidFill>
+            <a:srgbClr val="FFFFFF"/>
+          </a:solidFill>
+          <a:ln>
+            <a:solidFill>
+              <a:srgbClr val="D6DCE4"/>
+            </a:solidFill>
+          </a:ln>
+          <a:effectLst/>
+        </p:spPr>
+        <p:style>
+          <a:lnRef idx="1">
+            <a:schemeClr val="accent1"/>
+          </a:lnRef>
+          <a:fillRef idx="3">
+            <a:schemeClr val="accent1"/>
+          </a:fillRef>
+          <a:effectRef idx="2">
+            <a:schemeClr val="accent1"/>
+          </a:effectRef>
+          <a:fontRef idx="minor">
+            <a:schemeClr val="lt1"/>
+          </a:fontRef>
+        </p:style>
+        <p:txBody>
+          <a:bodyPr rtlCol="0" anchor="ctr" wrap="square"/>
+          <a:lstStyle/>
+          <a:p>
+            <a:pPr algn="ctr"/>
+          </a:p>
+        </p:txBody>
+      </p:sp>
+      <p:sp>
+        <p:nvSpPr>
+          <p:cNvPr id="15" name="TextBox 14"/>
+          <p:cNvSpPr txBox="1"/>
+          <p:nvPr/>
+        </p:nvSpPr>
+        <p:spPr>
+          <a:xfrm>
+            <a:off x="530352" y="1517904"/>
+            <a:ext cx="5340096" cy="237744"/>
+          </a:xfrm>
+          <a:prstGeom prst="rect">
+            <a:avLst/>
+          </a:prstGeom>
+          <a:noFill/>
+        </p:spPr>
+        <p:txBody>
+          <a:bodyPr wrap="square">
+            <a:spAutoFit/>
+          </a:bodyPr>
+          <a:lstStyle/>
+          <a:p>
+            <a:r>
+              <a:rPr sz="950" b="1">
+                <a:solidFill>
+                  <a:srgbClr val="010328"/>
+                </a:solidFill>
+                <a:latin typeface="微软雅黑"/>
+              </a:rPr>
+              <a:t>① run.py 实跑终端输出（逐字捕获）</a:t>
+            </a:r>
+          </a:p>
+        </p:txBody>
+      </p:sp>
+      <p:pic>
+        <p:nvPicPr>
+          <p:cNvPr id="16" name="Picture 15" descr="shot_run.png"/>
+          <p:cNvPicPr>
+            <a:picLocks noChangeAspect="1"/>
+          </p:cNvPicPr>
+          <p:nvPr/>
+        </p:nvPicPr>
+        <p:blipFill>
+          <a:blip r:embed="rId2"/>
+          <a:stretch>
+            <a:fillRect/>
+          </a:stretch>
+        </p:blipFill>
+        <p:spPr>
+          <a:xfrm>
+            <a:off x="964038" y="1773936"/>
+            <a:ext cx="4472722" cy="1956816"/>
+          </a:xfrm>
+          <a:prstGeom prst="rect">
+            <a:avLst/>
+          </a:prstGeom>
+        </p:spPr>
+      </p:pic>
+      <p:sp>
+        <p:nvSpPr>
+          <p:cNvPr id="17" name="Rectangle 16"/>
+          <p:cNvSpPr/>
+          <p:nvPr/>
+        </p:nvSpPr>
+        <p:spPr>
+          <a:xfrm>
+            <a:off x="6327648" y="1481328"/>
+            <a:ext cx="5486400" cy="2304288"/>
+          </a:xfrm>
+          <a:prstGeom prst="rect">
+            <a:avLst/>
+          </a:prstGeom>
+          <a:solidFill>
+            <a:srgbClr val="FFFFFF"/>
+          </a:solidFill>
+          <a:ln>
+            <a:solidFill>
+              <a:srgbClr val="D6DCE4"/>
+            </a:solidFill>
+          </a:ln>
+          <a:effectLst/>
+        </p:spPr>
+        <p:style>
+          <a:lnRef idx="1">
+            <a:schemeClr val="accent1"/>
+          </a:lnRef>
+          <a:fillRef idx="3">
+            <a:schemeClr val="accent1"/>
+          </a:fillRef>
+          <a:effectRef idx="2">
+            <a:schemeClr val="accent1"/>
+          </a:effectRef>
+          <a:fontRef idx="minor">
+            <a:schemeClr val="lt1"/>
+          </a:fontRef>
+        </p:style>
+        <p:txBody>
+          <a:bodyPr rtlCol="0" anchor="ctr" wrap="square"/>
+          <a:lstStyle/>
+          <a:p>
+            <a:pPr algn="ctr"/>
+          </a:p>
+        </p:txBody>
+      </p:sp>
+      <p:sp>
+        <p:nvSpPr>
+          <p:cNvPr id="18" name="TextBox 17"/>
+          <p:cNvSpPr txBox="1"/>
+          <p:nvPr/>
+        </p:nvSpPr>
+        <p:spPr>
+          <a:xfrm>
+            <a:off x="6400800" y="1517904"/>
+            <a:ext cx="5340096" cy="237744"/>
+          </a:xfrm>
+          <a:prstGeom prst="rect">
+            <a:avLst/>
+          </a:prstGeom>
+          <a:noFill/>
+        </p:spPr>
+        <p:txBody>
+          <a:bodyPr wrap="square">
+            <a:spAutoFit/>
+          </a:bodyPr>
+          <a:lstStyle/>
+          <a:p>
+            <a:r>
+              <a:rPr sz="950" b="1">
+                <a:solidFill>
+                  <a:srgbClr val="010328"/>
+                </a:solidFill>
+                <a:latin typeface="微软雅黑"/>
+              </a:rPr>
+              <a:t>② pytest 全绿终端输出（逐字捕获）</a:t>
+            </a:r>
+          </a:p>
+        </p:txBody>
+      </p:sp>
+      <p:pic>
+        <p:nvPicPr>
+          <p:cNvPr id="19" name="Picture 18" descr="shot_test.png"/>
+          <p:cNvPicPr>
+            <a:picLocks noChangeAspect="1"/>
+          </p:cNvPicPr>
+          <p:nvPr/>
+        </p:nvPicPr>
+        <p:blipFill>
+          <a:blip r:embed="rId3"/>
+          <a:stretch>
+            <a:fillRect/>
+          </a:stretch>
+        </p:blipFill>
+        <p:spPr>
+          <a:xfrm>
+            <a:off x="6834486" y="1773936"/>
+            <a:ext cx="4472722" cy="1956816"/>
+          </a:xfrm>
+          <a:prstGeom prst="rect">
+            <a:avLst/>
+          </a:prstGeom>
+        </p:spPr>
+      </p:pic>
+      <p:sp>
+        <p:nvSpPr>
+          <p:cNvPr id="20" name="Rectangle 19"/>
+          <p:cNvSpPr/>
+          <p:nvPr/>
+        </p:nvSpPr>
+        <p:spPr>
+          <a:xfrm>
+            <a:off x="457200" y="3877056"/>
+            <a:ext cx="5486400" cy="2304288"/>
+          </a:xfrm>
+          <a:prstGeom prst="rect">
+            <a:avLst/>
+          </a:prstGeom>
+          <a:solidFill>
+            <a:srgbClr val="FFFFFF"/>
+          </a:solidFill>
+          <a:ln>
+            <a:solidFill>
+              <a:srgbClr val="D6DCE4"/>
+            </a:solidFill>
+          </a:ln>
+          <a:effectLst/>
+        </p:spPr>
+        <p:style>
+          <a:lnRef idx="1">
+            <a:schemeClr val="accent1"/>
+          </a:lnRef>
+          <a:fillRef idx="3">
+            <a:schemeClr val="accent1"/>
+          </a:fillRef>
+          <a:effectRef idx="2">
+            <a:schemeClr val="accent1"/>
+          </a:effectRef>
+          <a:fontRef idx="minor">
+            <a:schemeClr val="lt1"/>
+          </a:fontRef>
+        </p:style>
+        <p:txBody>
+          <a:bodyPr rtlCol="0" anchor="ctr" wrap="square"/>
+          <a:lstStyle/>
+          <a:p>
+            <a:pPr algn="ctr"/>
+          </a:p>
+        </p:txBody>
+      </p:sp>
+      <p:sp>
+        <p:nvSpPr>
+          <p:cNvPr id="21" name="TextBox 20"/>
+          <p:cNvSpPr txBox="1"/>
+          <p:nvPr/>
+        </p:nvSpPr>
+        <p:spPr>
+          <a:xfrm>
+            <a:off x="530352" y="3913632"/>
+            <a:ext cx="5340096" cy="237744"/>
+          </a:xfrm>
+          <a:prstGeom prst="rect">
+            <a:avLst/>
+          </a:prstGeom>
+          <a:noFill/>
+        </p:spPr>
+        <p:txBody>
+          <a:bodyPr wrap="square">
+            <a:spAutoFit/>
+          </a:bodyPr>
+          <a:lstStyle/>
+          <a:p>
+            <a:r>
+              <a:rPr sz="950" b="1">
+                <a:solidFill>
+                  <a:srgbClr val="010328"/>
+                </a:solidFill>
+                <a:latin typeface="微软雅黑"/>
+              </a:rPr>
+              <a:t>③ report.txt「验收档位判定（实测）」段</a:t>
+            </a:r>
+          </a:p>
+        </p:txBody>
+      </p:sp>
+      <p:pic>
+        <p:nvPicPr>
+          <p:cNvPr id="22" name="Picture 21" descr="shot_report.png"/>
+          <p:cNvPicPr>
+            <a:picLocks noChangeAspect="1"/>
+          </p:cNvPicPr>
+          <p:nvPr/>
+        </p:nvPicPr>
+        <p:blipFill>
+          <a:blip r:embed="rId4"/>
+          <a:stretch>
+            <a:fillRect/>
+          </a:stretch>
+        </p:blipFill>
+        <p:spPr>
+          <a:xfrm>
+            <a:off x="964038" y="4169664"/>
+            <a:ext cx="4472722" cy="1956816"/>
+          </a:xfrm>
+          <a:prstGeom prst="rect">
+            <a:avLst/>
+          </a:prstGeom>
+        </p:spPr>
+      </p:pic>
+      <p:sp>
+        <p:nvSpPr>
+          <p:cNvPr id="23" name="Rectangle 22"/>
+          <p:cNvSpPr/>
+          <p:nvPr/>
+        </p:nvSpPr>
+        <p:spPr>
+          <a:xfrm>
+            <a:off x="6327648" y="3877056"/>
+            <a:ext cx="5486400" cy="2304288"/>
+          </a:xfrm>
+          <a:prstGeom prst="rect">
+            <a:avLst/>
+          </a:prstGeom>
+          <a:solidFill>
+            <a:srgbClr val="F7F9FB"/>
+          </a:solidFill>
+          <a:ln>
+            <a:solidFill>
+              <a:srgbClr val="D6DCE4"/>
+            </a:solidFill>
+          </a:ln>
+          <a:effectLst/>
+        </p:spPr>
+        <p:style>
+          <a:lnRef idx="1">
+            <a:schemeClr val="accent1"/>
+          </a:lnRef>
+          <a:fillRef idx="3">
+            <a:schemeClr val="accent1"/>
+          </a:fillRef>
+          <a:effectRef idx="2">
+            <a:schemeClr val="accent1"/>
+          </a:effectRef>
+          <a:fontRef idx="minor">
+            <a:schemeClr val="lt1"/>
+          </a:fontRef>
+        </p:style>
+        <p:txBody>
+          <a:bodyPr rtlCol="0" anchor="ctr" wrap="square"/>
+          <a:lstStyle/>
+          <a:p>
+            <a:pPr algn="ctr"/>
+          </a:p>
+        </p:txBody>
+      </p:sp>
+      <p:sp>
+        <p:nvSpPr>
+          <p:cNvPr id="24" name="TextBox 23"/>
+          <p:cNvSpPr txBox="1"/>
+          <p:nvPr/>
+        </p:nvSpPr>
+        <p:spPr>
+          <a:xfrm>
+            <a:off x="6400800" y="3913632"/>
+            <a:ext cx="5340096" cy="237744"/>
+          </a:xfrm>
+          <a:prstGeom prst="rect">
+            <a:avLst/>
+          </a:prstGeom>
+          <a:noFill/>
+        </p:spPr>
+        <p:txBody>
+          <a:bodyPr wrap="square">
+            <a:spAutoFit/>
+          </a:bodyPr>
+          <a:lstStyle/>
+          <a:p>
+            <a:r>
+              <a:rPr sz="950" b="1">
+                <a:solidFill>
+                  <a:srgbClr val="010328"/>
+                </a:solidFill>
+                <a:latin typeface="微软雅黑"/>
+              </a:rPr>
+              <a:t>④ 采集口径（可复现）</a:t>
+            </a:r>
+          </a:p>
+        </p:txBody>
+      </p:sp>
+      <p:sp>
+        <p:nvSpPr>
+          <p:cNvPr id="25" name="TextBox 24"/>
+          <p:cNvSpPr txBox="1"/>
+          <p:nvPr/>
+        </p:nvSpPr>
+        <p:spPr>
+          <a:xfrm>
+            <a:off x="6437376" y="4187952"/>
+            <a:ext cx="5266944" cy="1920240"/>
+          </a:xfrm>
+          <a:prstGeom prst="rect">
+            <a:avLst/>
+          </a:prstGeom>
+          <a:noFill/>
+        </p:spPr>
+        <p:txBody>
+          <a:bodyPr wrap="square">
+            <a:spAutoFit/>
+          </a:bodyPr>
+          <a:lstStyle/>
+          <a:p>
+            <a:r>
+              <a:rPr sz="950" b="0">
+                <a:solidFill>
+                  <a:srgbClr val="2B2F36"/>
+                </a:solidFill>
+                <a:latin typeface="微软雅黑"/>
+              </a:rPr>
+              <a:t>项目：05-AI应用基础48课时版/工程化项目/m23a_mlp/</a:t>
+            </a:r>
+          </a:p>
+          <a:p>
+            <a:r>
+              <a:rPr sz="950" b="0">
+                <a:solidFill>
+                  <a:srgbClr val="2B2F36"/>
+                </a:solidFill>
+                <a:latin typeface="微软雅黑"/>
+              </a:rPr>
+              <a:t>命令：/opt/anaconda3/bin/python run.py ｜ /opt/anaconda3/bin/python -m pytest -q</a:t>
+            </a:r>
+          </a:p>
+          <a:p>
+            <a:r>
+              <a:rPr sz="950" b="0">
+                <a:solidFill>
+                  <a:srgbClr val="2B2F36"/>
+                </a:solidFill>
+                <a:latin typeface="微软雅黑"/>
+              </a:rPr>
+              <a:t>采集：工具/ppt97/capture97.py（2026-10-28 10:48 真跑逐字捕获输出）</a:t>
+            </a:r>
+          </a:p>
+          <a:p>
+            <a:r>
+              <a:rPr sz="950" b="0">
+                <a:solidFill>
+                  <a:srgbClr val="2B2F36"/>
+                </a:solidFill>
+                <a:latin typeface="微软雅黑"/>
+              </a:rPr>
+              <a:t>渲染：工具/ppt97/terminal_png.py（终端截图，不改写任何数字）</a:t>
+            </a:r>
+          </a:p>
+          <a:p>
+            <a:r>
+              <a:rPr sz="950" b="0">
+                <a:solidFill>
+                  <a:srgbClr val="2B2F36"/>
+                </a:solidFill>
+                <a:latin typeface="微软雅黑"/>
+              </a:rPr>
+              <a:t>退出码：run=0 ｜ pytest=0</a:t>
+            </a:r>
+          </a:p>
+          <a:p>
+            <a:r>
+              <a:rPr sz="950" b="0">
+                <a:solidFill>
+                  <a:srgbClr val="2B2F36"/>
+                </a:solidFill>
+                <a:latin typeface="微软雅黑"/>
+              </a:rPr>
+              <a:t>档位判定取自 output/report.txt「验收档位判定（实测）」段</a:t>
+            </a:r>
+          </a:p>
+        </p:txBody>
+      </p:sp>
+      <p:sp>
+        <p:nvSpPr>
+          <p:cNvPr id="26" name="TextBox 25"/>
+          <p:cNvSpPr txBox="1"/>
+          <p:nvPr/>
+        </p:nvSpPr>
+        <p:spPr>
+          <a:xfrm>
+            <a:off x="457200" y="6254496"/>
+            <a:ext cx="11247120" cy="201168"/>
+          </a:xfrm>
+          <a:prstGeom prst="rect">
+            <a:avLst/>
+          </a:prstGeom>
+          <a:noFill/>
+        </p:spPr>
+        <p:txBody>
+          <a:bodyPr wrap="square">
+            <a:spAutoFit/>
+          </a:bodyPr>
+          <a:lstStyle/>
+          <a:p>
+            <a:r>
+              <a:rPr sz="900" b="0">
+                <a:solidFill>
+                  <a:srgbClr val="7A8698"/>
+                </a:solidFill>
+                <a:latin typeface="微软雅黑"/>
+              </a:rPr>
+              <a:t>截图内容逐字取自 工具/ppt97/evidence/m23a_mlp/（capture97.py 真跑捕获，未改写数字）</a:t>
+            </a:r>
+          </a:p>
+        </p:txBody>
+      </p:sp>
+    </p:spTree>
+  </p:cSld>
+  <p:clrMapOvr>
+    <a:masterClrMapping/>
+  </p:clrMapOvr>
+</p:sld>
+</file>
+
+<file path=ppt/slides/slide68.xml><?xml version="1.0" encoding="utf-8"?>
+<p:sld xmlns:a="http://schemas.openxmlformats.org/drawingml/2006/main" xmlns:p="http://schemas.openxmlformats.org/presentationml/2006/main" xmlns:r="http://schemas.openxmlformats.org/officeDocument/2006/relationships">
+  <p:cSld>
+    <p:spTree>
+      <p:nvGrpSpPr>
+        <p:cNvPr id="1" name=""/>
+        <p:cNvGrpSpPr/>
+        <p:nvPr/>
+      </p:nvGrpSpPr>
+      <p:grpSpPr/>
+      <p:sp>
+        <p:nvSpPr>
+          <p:cNvPr id="2" name="Rectangle 1"/>
+          <p:cNvSpPr/>
+          <p:nvPr/>
+        </p:nvSpPr>
+        <p:spPr>
+          <a:xfrm>
+            <a:off x="0" y="0"/>
+            <a:ext cx="12192000" cy="1150000"/>
+          </a:xfrm>
+          <a:prstGeom prst="rect">
+            <a:avLst/>
+          </a:prstGeom>
+          <a:solidFill>
+            <a:srgbClr val="010328"/>
+          </a:solidFill>
+          <a:ln>
+            <a:noFill/>
+          </a:ln>
+          <a:effectLst/>
+        </p:spPr>
+        <p:style>
+          <a:lnRef idx="1">
+            <a:schemeClr val="accent1"/>
+          </a:lnRef>
+          <a:fillRef idx="3">
+            <a:schemeClr val="accent1"/>
+          </a:fillRef>
+          <a:effectRef idx="2">
+            <a:schemeClr val="accent1"/>
+          </a:effectRef>
+          <a:fontRef idx="minor">
+            <a:schemeClr val="lt1"/>
+          </a:fontRef>
+        </p:style>
+        <p:txBody>
+          <a:bodyPr rtlCol="0" anchor="ctr"/>
+          <a:lstStyle/>
+          <a:p>
+            <a:pPr algn="ctr"/>
+          </a:p>
+        </p:txBody>
+      </p:sp>
+      <p:sp>
+        <p:nvSpPr>
+          <p:cNvPr id="3" name="Rectangle 2"/>
+          <p:cNvSpPr/>
+          <p:nvPr/>
+        </p:nvSpPr>
+        <p:spPr>
+          <a:xfrm>
+            <a:off x="0" y="1150000"/>
+            <a:ext cx="2600000" cy="70000"/>
+          </a:xfrm>
+          <a:prstGeom prst="rect">
+            <a:avLst/>
+          </a:prstGeom>
+          <a:solidFill>
+            <a:srgbClr val="F5670F"/>
+          </a:solidFill>
+          <a:ln>
+            <a:noFill/>
+          </a:ln>
+          <a:effectLst/>
+        </p:spPr>
+        <p:style>
+          <a:lnRef idx="1">
+            <a:schemeClr val="accent1"/>
+          </a:lnRef>
+          <a:fillRef idx="3">
+            <a:schemeClr val="accent1"/>
+          </a:fillRef>
+          <a:effectRef idx="2">
+            <a:schemeClr val="accent1"/>
+          </a:effectRef>
+          <a:fontRef idx="minor">
+            <a:schemeClr val="lt1"/>
+          </a:fontRef>
+        </p:style>
+        <p:txBody>
+          <a:bodyPr rtlCol="0" anchor="ctr"/>
+          <a:lstStyle/>
+          <a:p>
+            <a:pPr algn="ctr"/>
+          </a:p>
+        </p:txBody>
+      </p:sp>
+      <p:sp>
+        <p:nvSpPr>
+          <p:cNvPr id="4" name="TextBox 3"/>
+          <p:cNvSpPr txBox="1"/>
+          <p:nvPr/>
+        </p:nvSpPr>
+        <p:spPr>
+          <a:xfrm>
+            <a:off x="700000" y="300000"/>
+            <a:ext cx="10792000" cy="700000"/>
+          </a:xfrm>
+          <a:prstGeom prst="rect">
+            <a:avLst/>
+          </a:prstGeom>
+          <a:noFill/>
+        </p:spPr>
+        <p:txBody>
+          <a:bodyPr wrap="square" anchor="t">
+            <a:spAutoFit/>
+          </a:bodyPr>
+          <a:lstStyle/>
+          <a:p>
+            <a:pPr algn="l">
+              <a:lnSpc>
+                <a:spcPct val="110000"/>
+              </a:lnSpc>
+              <a:spcAft>
+                <a:spcPts val="600"/>
+              </a:spcAft>
+            </a:pPr>
+            <a:r>
+              <a:rPr sz="2400" b="1">
+                <a:solidFill>
+                  <a:srgbClr val="FFFFFF"/>
+                </a:solidFill>
+                <a:latin typeface="微软雅黑"/>
+              </a:rPr>
+              <a:t>产出图证据 · m23a_mlp</a:t>
+            </a:r>
+          </a:p>
+        </p:txBody>
+      </p:sp>
+      <p:sp>
+        <p:nvSpPr>
+          <p:cNvPr id="11" name="Rectangle 10"/>
+          <p:cNvSpPr/>
+          <p:nvPr/>
+        </p:nvSpPr>
+        <p:spPr>
+          <a:xfrm>
+            <a:off x="500000" y="6500000"/>
+            <a:ext cx="11100000" cy="20000"/>
+          </a:xfrm>
+          <a:prstGeom prst="rect">
+            <a:avLst/>
+          </a:prstGeom>
+          <a:solidFill>
+            <a:srgbClr val="C9D4EE"/>
+          </a:solidFill>
+          <a:ln>
+            <a:noFill/>
+          </a:ln>
+          <a:effectLst/>
+        </p:spPr>
+        <p:style>
+          <a:lnRef idx="1">
+            <a:schemeClr val="accent1"/>
+          </a:lnRef>
+          <a:fillRef idx="3">
+            <a:schemeClr val="accent1"/>
+          </a:fillRef>
+          <a:effectRef idx="2">
+            <a:schemeClr val="accent1"/>
+          </a:effectRef>
+          <a:fontRef idx="minor">
+            <a:schemeClr val="lt1"/>
+          </a:fontRef>
+        </p:style>
+        <p:txBody>
+          <a:bodyPr rtlCol="0" anchor="ctr"/>
+          <a:lstStyle/>
+          <a:p>
+            <a:pPr algn="ctr"/>
+          </a:p>
+        </p:txBody>
+      </p:sp>
+      <p:sp>
+        <p:nvSpPr>
+          <p:cNvPr id="12" name="TextBox 11"/>
+          <p:cNvSpPr txBox="1"/>
+          <p:nvPr/>
+        </p:nvSpPr>
+        <p:spPr>
+          <a:xfrm>
+            <a:off x="500000" y="6540000"/>
+            <a:ext cx="7000000" cy="300000"/>
+          </a:xfrm>
+          <a:prstGeom prst="rect">
+            <a:avLst/>
+          </a:prstGeom>
+          <a:noFill/>
+        </p:spPr>
+        <p:txBody>
+          <a:bodyPr wrap="square" anchor="t">
+            <a:spAutoFit/>
+          </a:bodyPr>
+          <a:lstStyle/>
+          <a:p>
+            <a:pPr algn="l">
+              <a:lnSpc>
+                <a:spcPct val="110000"/>
+              </a:lnSpc>
+              <a:spcAft>
+                <a:spcPts val="600"/>
+              </a:spcAft>
+            </a:pPr>
+            <a:r>
+              <a:rPr sz="1000" b="0">
+                <a:solidFill>
+                  <a:srgbClr val="8A97B5"/>
+                </a:solidFill>
+                <a:latin typeface="微软雅黑"/>
+              </a:rPr>
+              <a:t>两江智造集团 · AI应用基础48课时版</a:t>
+            </a:r>
+          </a:p>
+        </p:txBody>
+      </p:sp>
+      <p:sp>
+        <p:nvSpPr>
+          <p:cNvPr id="13" name="TextBox 12"/>
+          <p:cNvSpPr txBox="1"/>
+          <p:nvPr/>
+        </p:nvSpPr>
+        <p:spPr>
+          <a:xfrm>
+            <a:off x="10600000" y="6540000"/>
+            <a:ext cx="1000000" cy="300000"/>
+          </a:xfrm>
+          <a:prstGeom prst="rect">
+            <a:avLst/>
+          </a:prstGeom>
+          <a:noFill/>
+        </p:spPr>
+        <p:txBody>
+          <a:bodyPr wrap="square" anchor="t">
+            <a:spAutoFit/>
+          </a:bodyPr>
+          <a:lstStyle/>
+          <a:p>
+            <a:pPr algn="r">
+              <a:lnSpc>
+                <a:spcPct val="110000"/>
+              </a:lnSpc>
+              <a:spcAft>
+                <a:spcPts val="600"/>
+              </a:spcAft>
+            </a:pPr>
+            <a:r>
+              <a:rPr sz="1000" b="0">
+                <a:solidFill>
+                  <a:srgbClr val="8A97B5"/>
+                </a:solidFill>
+                <a:latin typeface="微软雅黑"/>
+              </a:rPr>
+              <a:t>42 / 68</a:t>
+            </a:r>
+          </a:p>
+        </p:txBody>
+      </p:sp>
+      <p:sp>
+        <p:nvSpPr>
+          <p:cNvPr id="14" name="Rectangle 13"/>
+          <p:cNvSpPr/>
+          <p:nvPr/>
+        </p:nvSpPr>
+        <p:spPr>
+          <a:xfrm>
+            <a:off x="457200" y="1481328"/>
+            <a:ext cx="11356848" cy="4663440"/>
+          </a:xfrm>
+          <a:prstGeom prst="rect">
+            <a:avLst/>
+          </a:prstGeom>
+          <a:solidFill>
+            <a:srgbClr val="FFFFFF"/>
+          </a:solidFill>
+          <a:ln>
+            <a:solidFill>
+              <a:srgbClr val="D6DCE4"/>
+            </a:solidFill>
+          </a:ln>
+          <a:effectLst/>
+        </p:spPr>
+        <p:style>
+          <a:lnRef idx="1">
+            <a:schemeClr val="accent1"/>
+          </a:lnRef>
+          <a:fillRef idx="3">
+            <a:schemeClr val="accent1"/>
+          </a:fillRef>
+          <a:effectRef idx="2">
+            <a:schemeClr val="accent1"/>
+          </a:effectRef>
+          <a:fontRef idx="minor">
+            <a:schemeClr val="lt1"/>
+          </a:fontRef>
+        </p:style>
+        <p:txBody>
+          <a:bodyPr rtlCol="0" anchor="ctr" wrap="square"/>
+          <a:lstStyle/>
+          <a:p>
+            <a:pPr algn="ctr"/>
+          </a:p>
+        </p:txBody>
+      </p:sp>
+      <p:sp>
+        <p:nvSpPr>
+          <p:cNvPr id="15" name="TextBox 14"/>
+          <p:cNvSpPr txBox="1"/>
+          <p:nvPr/>
+        </p:nvSpPr>
+        <p:spPr>
+          <a:xfrm>
+            <a:off x="530352" y="1517904"/>
+            <a:ext cx="11210544" cy="237744"/>
+          </a:xfrm>
+          <a:prstGeom prst="rect">
+            <a:avLst/>
+          </a:prstGeom>
+          <a:noFill/>
+        </p:spPr>
+        <p:txBody>
+          <a:bodyPr wrap="square">
+            <a:spAutoFit/>
+          </a:bodyPr>
+          <a:lstStyle/>
+          <a:p>
+            <a:r>
+              <a:rPr sz="950" b="1">
+                <a:solidFill>
+                  <a:srgbClr val="010328"/>
+                </a:solidFill>
+                <a:latin typeface="微软雅黑"/>
+              </a:rPr>
+              <a:t>产出图 · learning_curve.png</a:t>
+            </a:r>
+          </a:p>
+        </p:txBody>
+      </p:sp>
+      <p:sp>
+        <p:nvSpPr>
+          <p:cNvPr id="16" name="TextBox 15"/>
+          <p:cNvSpPr txBox="1"/>
+          <p:nvPr/>
+        </p:nvSpPr>
+        <p:spPr>
+          <a:xfrm>
+            <a:off x="530352" y="1755648"/>
+            <a:ext cx="11210544" cy="201168"/>
+          </a:xfrm>
+          <a:prstGeom prst="rect">
+            <a:avLst/>
+          </a:prstGeom>
+          <a:noFill/>
+        </p:spPr>
+        <p:txBody>
+          <a:bodyPr wrap="square">
+            <a:spAutoFit/>
+          </a:bodyPr>
+          <a:lstStyle/>
+          <a:p>
+            <a:r>
+              <a:rPr sz="850" b="0">
+                <a:solidFill>
+                  <a:srgbClr val="7A8698"/>
+                </a:solidFill>
+                <a:latin typeface="微软雅黑"/>
+              </a:rPr>
+              <a:t>output/learning_curve.png ｜ 47 KB ｜ run.py 本次落盘</a:t>
+            </a:r>
+          </a:p>
+        </p:txBody>
+      </p:sp>
+      <p:pic>
+        <p:nvPicPr>
+          <p:cNvPr id="17" name="Picture 16" descr="learning_curve.png"/>
+          <p:cNvPicPr>
+            <a:picLocks noChangeAspect="1"/>
+          </p:cNvPicPr>
+          <p:nvPr/>
+        </p:nvPicPr>
+        <p:blipFill>
+          <a:blip r:embed="rId2"/>
+          <a:stretch>
+            <a:fillRect/>
+          </a:stretch>
+        </p:blipFill>
+        <p:spPr>
+          <a:xfrm>
+            <a:off x="2623820" y="1993392"/>
+            <a:ext cx="7023608" cy="4078224"/>
+          </a:xfrm>
+          <a:prstGeom prst="rect">
+            <a:avLst/>
+          </a:prstGeom>
+        </p:spPr>
+      </p:pic>
+      <p:sp>
+        <p:nvSpPr>
+          <p:cNvPr id="18" name="TextBox 17"/>
+          <p:cNvSpPr txBox="1"/>
+          <p:nvPr/>
+        </p:nvSpPr>
+        <p:spPr>
+          <a:xfrm>
+            <a:off x="457200" y="6254496"/>
+            <a:ext cx="11247120" cy="201168"/>
+          </a:xfrm>
+          <a:prstGeom prst="rect">
+            <a:avLst/>
+          </a:prstGeom>
+          <a:noFill/>
+        </p:spPr>
+        <p:txBody>
+          <a:bodyPr wrap="square">
+            <a:spAutoFit/>
+          </a:bodyPr>
+          <a:lstStyle/>
+          <a:p>
+            <a:r>
+              <a:rPr sz="900" b="0">
+                <a:solidFill>
+                  <a:srgbClr val="7A8698"/>
+                </a:solidFill>
+                <a:latin typeface="微软雅黑"/>
+              </a:rPr>
+              <a:t>以上图像由 run.py 本次运行落盘到 output/，非外部素材。</a:t>
+            </a:r>
+          </a:p>
+        </p:txBody>
+      </p:sp>
+    </p:spTree>
+  </p:cSld>
+  <p:clrMapOvr>
+    <a:masterClrMapping/>
+  </p:clrMapOvr>
+</p:sld>
+</file>
+
 <file path=ppt/slides/slide7.xml><?xml version="1.0" encoding="utf-8"?>
 <p:sld xmlns:a="http://schemas.openxmlformats.org/drawingml/2006/main" xmlns:p="http://schemas.openxmlformats.org/presentationml/2006/main" xmlns:r="http://schemas.openxmlformats.org/officeDocument/2006/relationships">
   <p:cSld>
@@ -61128,7 +63704,7 @@
                 </a:solidFill>
                 <a:latin typeface="微软雅黑"/>
               </a:rPr>
-              <a:t>7 / 65</a:t>
+              <a:t>7 / 68</a:t>
             </a:r>
           </a:p>
         </p:txBody>
@@ -62100,7 +64676,7 @@
                 </a:solidFill>
                 <a:latin typeface="微软雅黑"/>
               </a:rPr>
-              <a:t>8 / 65</a:t>
+              <a:t>8 / 68</a:t>
             </a:r>
           </a:p>
         </p:txBody>
@@ -62955,7 +65531,7 @@
                 </a:solidFill>
                 <a:latin typeface="微软雅黑"/>
               </a:rPr>
-              <a:t>9 / 65</a:t>
+              <a:t>9 / 68</a:t>
             </a:r>
           </a:p>
         </p:txBody>
